--- a/docs/발표자료-CBT-2026-08.pptx
+++ b/docs/발표자료-CBT-2026-08.pptx
@@ -531,7 +531,7 @@
           <a:p>
             <a:r>
               <a:rPr lang="en-US" dirty="0"/>
-              <a:t>사내 NDT 자격 필기시험을 CBT 로 옮긴 결과를 보고드립니다.</a:t>
+              <a:t>종이로 치르던 사내 자격 필기시험을 프로그램으로 옮겼습니다. 무엇이 달라졌는지 말씀드리겠습니다.</a:t>
             </a:r>
             <a:endParaRPr lang="en-US" dirty="0"/>
           </a:p>
@@ -619,7 +619,7 @@
           <a:p>
             <a:r>
               <a:rPr lang="en-US" dirty="0"/>
-              <a:t>빠진 시험이 있으면 무엇이 빠졌는지 적어 보여줍니다. 사람이 착각해서 합격시킬 일이 없습니다.</a:t>
+              <a:t>무엇이 빠졌는지를 적어 보여 줍니다. 사람이 착각해서 합격시킬 일이 없습니다.</a:t>
             </a:r>
             <a:endParaRPr lang="en-US" dirty="0"/>
           </a:p>
@@ -707,7 +707,7 @@
           <a:p>
             <a:r>
               <a:rPr lang="en-US" dirty="0"/>
-              <a:t>자격 만료를 놓치는 것이 가장 큰 위험이었습니다.</a:t>
+              <a:t>만드는 동안 가장 마음에 걸렸던 것이 이 만료일이었습니다. 여기서 놓치면 되돌릴 방법이 없습니다.</a:t>
             </a:r>
             <a:endParaRPr lang="en-US" dirty="0"/>
           </a:p>
@@ -795,7 +795,7 @@
           <a:p>
             <a:r>
               <a:rPr lang="en-US" dirty="0"/>
-              <a:t>이 10점 차이를 사람이 판정하면 놓치기 쉽습니다. 면제자인 줄 모르고 70%로 보면 그대로 잘못 합격시킵니다.</a:t>
+              <a:t>이 10점 차이는 사람이 보면 놓치기 쉽습니다. 면제받은 사람인 줄 모르고 70%로 보면 그대로 잘못 합격시킵니다.</a:t>
             </a:r>
             <a:endParaRPr lang="en-US" dirty="0"/>
           </a:p>
@@ -883,7 +883,7 @@
           <a:p>
             <a:r>
               <a:rPr lang="en-US" dirty="0"/>
-              <a:t>이런 것이 나중에 감사에서 나오면 곤란합니다. 그때그때 잡습니다.</a:t>
+              <a:t>이런 것이 한참 지나 감사에서 나오면 곤란합니다. 그때그때 잡아 두는 편이 낫습니다.</a:t>
             </a:r>
             <a:endParaRPr lang="en-US" dirty="0"/>
           </a:p>
@@ -971,7 +971,7 @@
           <a:p>
             <a:r>
               <a:rPr lang="en-US" dirty="0"/>
-              <a:t>감사 때 바로 뽑아 낼 수 있습니다. 기록은 퇴사 후 5년 보존입니다.</a:t>
+              <a:t>감사 때 뒤질 것 없이 바로 뽑아 냅니다. 기록은 퇴사 뒤 5년까지 남겨 둡니다.</a:t>
             </a:r>
             <a:endParaRPr lang="en-US" dirty="0"/>
           </a:p>
@@ -1147,7 +1147,7 @@
           <a:p>
             <a:r>
               <a:rPr lang="en-US" dirty="0"/>
-              <a:t>종이로 시행하면 폐기 대장(E02-04)도 함께 뽑습니다.</a:t>
+              <a:t>종이로 치르면 남은 시험지를 폐기한 기록도 함께 뽑아 둡니다.</a:t>
             </a:r>
             <a:endParaRPr lang="en-US" dirty="0"/>
           </a:p>
@@ -1235,7 +1235,7 @@
           <a:p>
             <a:r>
               <a:rPr lang="en-US" dirty="0"/>
-              <a:t>사서 쓴 것이 아니라 우리 규정에 맞춰 직접 짠 것입니다. 그래서 규정이 바뀌면 우리가 고칠 수 있습니다.</a:t>
+              <a:t>사 온 것이 아니라 우리 규정에 맞춰 지은 것입니다. 그래서 규정이 바뀌면 남에게 맡기지 않고 우리가 고칠 수 있습니다.</a:t>
             </a:r>
             <a:endParaRPr lang="en-US" dirty="0"/>
           </a:p>
@@ -1499,7 +1499,7 @@
           <a:p>
             <a:r>
               <a:rPr lang="en-US" dirty="0"/>
-              <a:t>여섯 가지가 모두 사람 손이었습니다. 마지막 줄이 가장 큰 문제였습니다.</a:t>
+              <a:t>여섯 가지가 다 사람 손을 거쳤습니다. 그중에서도 마지막 줄, 만료일을 놓치는 것이 가장 마음에 걸렸습니다.</a:t>
             </a:r>
             <a:endParaRPr lang="en-US" dirty="0"/>
           </a:p>
@@ -1587,7 +1587,7 @@
           <a:p>
             <a:r>
               <a:rPr lang="en-US" dirty="0"/>
-              <a:t>규정이 개정되면 이 표를 보고 그 자리만 고치면 됩니다. 프로그램 전체를 뒤질 필요가 없습니다.</a:t>
+              <a:t>규정이 바뀌면 이 표를 보고 그 자리만 고치면 됩니다. 프로그램 전체를 뒤질 일이 없습니다.</a:t>
             </a:r>
             <a:endParaRPr lang="en-US" dirty="0"/>
           </a:p>
@@ -1851,7 +1851,7 @@
           <a:p>
             <a:r>
               <a:rPr lang="en-US" dirty="0"/>
-              <a:t>문제 유출을 걱정하지 않아도 됩니다. 조합이 사실상 무한합니다.</a:t>
+              <a:t>문제가 새어 나갈 걱정을 덜었습니다. 앞사람 시험지를 봐도 소용이 없습니다.</a:t>
             </a:r>
             <a:endParaRPr lang="en-US" dirty="0"/>
           </a:p>
@@ -1939,7 +1939,7 @@
           <a:p>
             <a:r>
               <a:rPr lang="en-US" dirty="0"/>
-              <a:t>규정이 바뀌면 그 자리를 찾아 고치면 됩니다.</a:t>
+              <a:t>규정이 바뀌면 이 대조표를 보고 그 자리를 찾아 고치면 됩니다.</a:t>
             </a:r>
             <a:endParaRPr lang="en-US" dirty="0"/>
           </a:p>
@@ -2291,7 +2291,7 @@
           <a:p>
             <a:r>
               <a:rPr lang="en-US" dirty="0"/>
-              <a:t>검토 모드는 지금 켜져 있습니다. 시험 전에 끄면 됩니다 — 한 줄만 바꾸면 됩니다.</a:t>
+              <a:t>검토 모드가 지금 켜져 있습니다. 시험 전에 한 줄만 바꾸면 됩니다.</a:t>
             </a:r>
             <a:endParaRPr lang="en-US" dirty="0"/>
           </a:p>
@@ -2379,7 +2379,7 @@
           <a:p>
             <a:r>
               <a:rPr lang="en-US" dirty="0"/>
-              <a:t>이 한 문장이 이 발표의 전부입니다.</a:t>
+              <a:t>이 한 문장만 남겨 드리고 싶습니다.</a:t>
             </a:r>
             <a:endParaRPr lang="en-US" dirty="0"/>
           </a:p>
@@ -2467,7 +2467,7 @@
           <a:p>
             <a:r>
               <a:rPr lang="en-US" dirty="0"/>
-              <a:t>이 여섯 개만 기억하셔도 됩니다. 뒤에서 하나씩 보여 드리겠습니다.</a:t>
+              <a:t>여섯 개만 기억하셔도 됩니다. 뒤에서 하나씩 화면으로 보여 드리겠습니다.</a:t>
             </a:r>
             <a:endParaRPr lang="en-US" dirty="0"/>
           </a:p>
@@ -2643,7 +2643,7 @@
           <a:p>
             <a:r>
               <a:rPr lang="en-US" dirty="0"/>
-              <a:t>이 화면이 전부입니다. 이름 넣고 종목 고르면 시험이 시작됩니다.</a:t>
+              <a:t>응시자가 보는 것은 이 화면 하나입니다. 설명이 필요 없게 만드는 데 시간을 많이 썼습니다.</a:t>
             </a:r>
             <a:endParaRPr lang="en-US" dirty="0"/>
           </a:p>
@@ -2819,7 +2819,7 @@
           <a:p>
             <a:r>
               <a:rPr lang="en-US" dirty="0"/>
-              <a:t>현장에서도 같은 화면에서 검사절차서를 펴 볼 수 있습니다. 사무실로 찾으러 가지 않아도 됩니다.</a:t>
+              <a:t>시험을 치르는 그 화면에서 그대로 펼쳐집니다. 종이 절차서를 들고 다닐 일이 없습니다.</a:t>
             </a:r>
             <a:endParaRPr lang="en-US" dirty="0"/>
           </a:p>
@@ -2907,7 +2907,7 @@
           <a:p>
             <a:r>
               <a:rPr lang="en-US" dirty="0"/>
-              <a:t>채점 실수가 자격 시험에서 나오면 되돌리기 어렵습니다.</a:t>
+              <a:t>자격 시험에서 채점이 한 번 어긋나면 되돌리기가 어렵습니다. 그 자리를 아예 없앴습니다.</a:t>
             </a:r>
             <a:endParaRPr lang="en-US" dirty="0"/>
           </a:p>
@@ -3083,7 +3083,7 @@
           <a:p>
             <a:r>
               <a:rPr lang="en-US" dirty="0"/>
-              <a:t>이 한 화면이 자격 판정을 다 합니다. 다음 장부터 한 사람씩 뜯어 보겠습니다.</a:t>
+              <a:t>예전에는 이 판정을 사람이 표를 보며 했습니다. 지금은 이 화면 하나가 대신합니다.</a:t>
             </a:r>
             <a:endParaRPr lang="en-US" dirty="0"/>
           </a:p>
@@ -3709,7 +3709,7 @@
                 <a:ea typeface="맑은 고딕" pitchFamily="34" charset="-122"/>
                 <a:cs typeface="맑은 고딕" pitchFamily="34" charset="-120"/>
               </a:rPr>
-              <a:t>개별 시험은 70% 이상, 전 과목 평균은 80% 이상이어야 합니다</a:t>
+              <a:t>한 과목이라도 70%에 못 미치면 안 되고, 평균은 80%를 넘겨야 합니다</a:t>
             </a:r>
             <a:endParaRPr lang="en-US" sz="1900" dirty="0"/>
           </a:p>
@@ -3860,7 +3860,7 @@
                 <a:ea typeface="맑은 고딕" pitchFamily="34" charset="-122"/>
                 <a:cs typeface="맑은 고딕" pitchFamily="34" charset="-120"/>
               </a:rPr>
-              <a:t>두 시험 다 70%를 넘겼습니다. 그런데 평균이 80%에 못 미쳐 불합격입니다.</a:t>
+              <a:t>두 과목 다 70%는 넘겼습니다. 그런데 평균이 77.5라 80%에 닿지 못했습니다.</a:t>
             </a:r>
             <a:endParaRPr lang="en-US" sz="1300" dirty="0"/>
           </a:p>
@@ -4028,7 +4028,7 @@
                 <a:ea typeface="맑은 고딕" pitchFamily="34" charset="-122"/>
                 <a:cs typeface="맑은 고딕" pitchFamily="34" charset="-120"/>
               </a:rPr>
-              <a:t>Level Ⅲ 전문시험은 아직 종이로 칩니다. 점수가 안 들어오니 임의로 합격시키지 않고 「미완」으로 둡니다.</a:t>
+              <a:t>Level Ⅲ 전문시험은 아직 종이로 칩니다. 점수가 들어오지 않았으니 임의로 합격시키지 않고 「미완」으로 둡니다.</a:t>
             </a:r>
             <a:endParaRPr lang="en-US" sz="1250" dirty="0"/>
           </a:p>
@@ -4170,7 +4170,7 @@
                 <a:ea typeface="맑은 고딕" pitchFamily="34" charset="-122"/>
                 <a:cs typeface="맑은 고딕" pitchFamily="34" charset="-120"/>
               </a:rPr>
-              <a:t>자격이 만료된 사람이 검사를 나가면 고객 감사에서 바로 지적됩니다</a:t>
+              <a:t>자격이 끝난 줄 모르고 검사를 나가면, 고객 감사에서 그대로 지적을 받습니다</a:t>
             </a:r>
             <a:endParaRPr lang="en-US" sz="1900" dirty="0"/>
           </a:p>
@@ -4360,7 +4360,7 @@
                 <a:ea typeface="맑은 고딕" pitchFamily="34" charset="-122"/>
                 <a:cs typeface="맑은 고딕" pitchFamily="34" charset="-120"/>
               </a:rPr>
-              <a:t>만료되는 달의 마지막 날에 끝난다.</a:t>
+              <a:t>만료되는 달의 마지막 날에 끝납니다.</a:t>
             </a:r>
             <a:endParaRPr lang="en-US" sz="1250" dirty="0"/>
           </a:p>
@@ -4380,7 +4380,7 @@
                 <a:ea typeface="맑은 고딕" pitchFamily="34" charset="-122"/>
                 <a:cs typeface="맑은 고딕" pitchFamily="34" charset="-120"/>
               </a:rPr>
-              <a:t>Level Ⅱ 는 3년, Level Ⅲ 는 5년마다 다시 받는다.</a:t>
+              <a:t>Level Ⅱ 는 3년, Level Ⅲ 는 5년마다 다시 받습니다.</a:t>
             </a:r>
             <a:endParaRPr lang="en-US" sz="1250" dirty="0"/>
           </a:p>
@@ -4525,7 +4525,7 @@
                 <a:ea typeface="맑은 고딕" pitchFamily="34" charset="-122"/>
                 <a:cs typeface="맑은 고딕" pitchFamily="34" charset="-120"/>
               </a:rPr>
-              <a:t>3개월 안에 드는 순간 색이 바뀐다.</a:t>
+              <a:t>석 달 안에 드는 순간 색이 바뀝니다.</a:t>
             </a:r>
             <a:endParaRPr lang="en-US" sz="1250" dirty="0"/>
           </a:p>
@@ -4545,7 +4545,7 @@
                 <a:ea typeface="맑은 고딕" pitchFamily="34" charset="-122"/>
                 <a:cs typeface="맑은 고딕" pitchFamily="34" charset="-120"/>
               </a:rPr>
-              <a:t>명단을 뽑아 본인과 소속 부서에 알린다.</a:t>
+              <a:t>명단을 뽑아 본인과 부서에 알리면 됩니다.</a:t>
             </a:r>
             <a:endParaRPr lang="en-US" sz="1250" dirty="0"/>
           </a:p>
@@ -4690,7 +4690,7 @@
                 <a:ea typeface="맑은 고딕" pitchFamily="34" charset="-122"/>
                 <a:cs typeface="맑은 고딕" pitchFamily="34" charset="-120"/>
               </a:rPr>
-              <a:t>자격이 살아 있어도 시력검사가 만료되면 잡힌다.</a:t>
+              <a:t>자격이 살아 있어도 시력검사가 지나면 잡힙니다.</a:t>
             </a:r>
             <a:endParaRPr lang="en-US" sz="1250" dirty="0"/>
           </a:p>
@@ -4710,7 +4710,7 @@
                 <a:ea typeface="맑은 고딕" pitchFamily="34" charset="-122"/>
                 <a:cs typeface="맑은 고딕" pitchFamily="34" charset="-120"/>
               </a:rPr>
-              <a:t>검사일로부터 1년이다.</a:t>
+              <a:t>시력검사는 받은 날로부터 1년입니다.</a:t>
             </a:r>
             <a:endParaRPr lang="en-US" sz="1250" dirty="0"/>
           </a:p>
@@ -4749,7 +4749,7 @@
                 <a:ea typeface="맑은 고딕" pitchFamily="34" charset="-122"/>
                 <a:cs typeface="맑은 고딕" pitchFamily="34" charset="-120"/>
               </a:rPr>
-              <a:t>예전에는 달력에 적어 두고 사람이 챙겼습니다. 이제 명단이 저절로 나옵니다.</a:t>
+              <a:t>예전에는 달력에 적어 두고 사람이 챙겼습니다. 이제는 명단이 저절로 나옵니다.</a:t>
             </a:r>
             <a:endParaRPr lang="en-US" sz="1500" dirty="0"/>
           </a:p>
@@ -4891,7 +4891,7 @@
                 <a:ea typeface="맑은 고딕" pitchFamily="34" charset="-122"/>
                 <a:cs typeface="맑은 고딕" pitchFamily="34" charset="-120"/>
               </a:rPr>
-              <a:t>ASNT·ISO 9712 자격이 있으면 일부 시험을 면제받습니다. 대신 합격선이 80%입니다</a:t>
+              <a:t>바깥 기관 자격이 있으면 몇 과목은 면제받습니다. 대신 치르는 시험의 합격선이 80%로 올라갑니다</a:t>
             </a:r>
             <a:endParaRPr lang="en-US" sz="1900" dirty="0"/>
           </a:p>
@@ -4930,7 +4930,7 @@
                 <a:ea typeface="맑은 고딕" pitchFamily="34" charset="-122"/>
                 <a:cs typeface="맑은 고딕" pitchFamily="34" charset="-120"/>
               </a:rPr>
-              <a:t>같은 ISO 9712 Level Ⅱ 소지자, 같은 전문시험 — 점수만 다릅니다</a:t>
+              <a:t>두 사람 다 같은 자격을 가졌고 같은 전문시험을 쳤습니다. 다른 것은 점수뿐입니다</a:t>
             </a:r>
             <a:endParaRPr lang="en-US" sz="1400" dirty="0"/>
           </a:p>
@@ -5078,7 +5078,7 @@
                 <a:ea typeface="맑은 고딕" pitchFamily="34" charset="-122"/>
                 <a:cs typeface="맑은 고딕" pitchFamily="34" charset="-120"/>
               </a:rPr>
-              <a:t>면제받지 않았다면 개별 70%를 넘겨 통과였을 점수입니다. 면제자는 80%가 기준입니다.</a:t>
+              <a:t>면제를 받지 않았더라면 70%를 넘겨 붙었을 점수입니다. 면제받은 사람에게는 80%가 기준입니다.</a:t>
             </a:r>
             <a:endParaRPr lang="en-US" sz="1300" dirty="0"/>
           </a:p>
@@ -5117,7 +5117,7 @@
                 <a:ea typeface="맑은 고딕" pitchFamily="34" charset="-122"/>
                 <a:cs typeface="맑은 고딕" pitchFamily="34" charset="-120"/>
               </a:rPr>
-              <a:t>일반시험은 「면제」로 뜨고, 옆에 ISO9712 II 표가 붙습니다. 미응시와 헷갈리지 않게 색을 달리했습니다.</a:t>
+              <a:t>면제받은 과목은 「면제」로 뜨고 옆에 어느 자격으로 면제받았는지가 붙습니다. 안 친 것과 헷갈리지 않게 색을 달리했습니다.</a:t>
             </a:r>
             <a:endParaRPr lang="en-US" sz="1250" dirty="0"/>
           </a:p>
@@ -5368,7 +5368,7 @@
                 <a:ea typeface="맑은 고딕" pitchFamily="34" charset="-122"/>
                 <a:cs typeface="맑은 고딕" pitchFamily="34" charset="-120"/>
               </a:rPr>
-              <a:t>불합격한 뒤 30일이 지나야 다시 칠 수 있습니다</a:t>
+              <a:t>한 번 떨어지면 30일이 지나야 다시 칠 수 있습니다. 그 사이를 세는 일도 사람 몫이었습니다</a:t>
             </a:r>
             <a:endParaRPr lang="en-US" sz="1900" dirty="0"/>
           </a:p>
@@ -5516,7 +5516,7 @@
                 <a:ea typeface="맑은 고딕" pitchFamily="34" charset="-122"/>
                 <a:cs typeface="맑은 고딕" pitchFamily="34" charset="-120"/>
               </a:rPr>
-              <a:t>추가 훈련 증거가 있으면 30일 이전에도 칠 수 있습니다. 그런 경우인지 사람이 확인하라고 알려 줍니다.</a:t>
+              <a:t>추가 교육을 받았다는 증거가 있으면 30일 전에도 칠 수 있습니다. 그런 경우인지 확인해 보라고 짚어 줄 뿐, 프로그램이 막지는 않습니다.</a:t>
             </a:r>
             <a:endParaRPr lang="en-US" sz="1300" dirty="0"/>
           </a:p>
@@ -5711,7 +5711,7 @@
                 <a:ea typeface="맑은 고딕" pitchFamily="34" charset="-122"/>
                 <a:cs typeface="맑은 고딕" pitchFamily="34" charset="-120"/>
               </a:rPr>
-              <a:t>사람이 날짜를 세지 않아도 프로그램이 먼저 짚어 줍니다.</a:t>
+              <a:t>날짜를 일일이 세지 않아도 먼저 짚어 줍니다.</a:t>
             </a:r>
             <a:endParaRPr lang="en-US" sz="1350" dirty="0"/>
           </a:p>
@@ -5853,7 +5853,7 @@
                 <a:ea typeface="맑은 고딕" pitchFamily="34" charset="-122"/>
                 <a:cs typeface="맑은 고딕" pitchFamily="34" charset="-120"/>
               </a:rPr>
-              <a:t>규정이 남기라는 기록 12가지가 구글 스프레드시트에 저절로 쌓입니다</a:t>
+              <a:t>규정이 남기라고 정해 둔 기록 열두 가지가, 시험을 칠 때마다 저절로 쌓입니다</a:t>
             </a:r>
             <a:endParaRPr lang="en-US" sz="1900" dirty="0"/>
           </a:p>
@@ -6021,7 +6021,7 @@
                 <a:ea typeface="맑은 고딕" pitchFamily="34" charset="-122"/>
                 <a:cs typeface="맑은 고딕" pitchFamily="34" charset="-120"/>
               </a:rPr>
-              <a:t>제출할 때마다 회차를 다시 세어 갱신</a:t>
+              <a:t>누가 제출할 때마다 그 회차를 다시 세어 갱신합니다</a:t>
             </a:r>
             <a:endParaRPr lang="en-US" sz="1250" dirty="0"/>
           </a:p>
@@ -6099,7 +6099,7 @@
                 <a:ea typeface="맑은 고딕" pitchFamily="34" charset="-122"/>
                 <a:cs typeface="맑은 고딕" pitchFamily="34" charset="-120"/>
               </a:rPr>
-              <a:t>기준일자마다 한 벌씩 쌓인다</a:t>
+              <a:t>기준일자마다 한 벌씩 남습니다</a:t>
             </a:r>
             <a:endParaRPr lang="en-US" sz="1250" dirty="0"/>
           </a:p>
@@ -6241,7 +6241,7 @@
                 <a:ea typeface="맑은 고딕" pitchFamily="34" charset="-122"/>
                 <a:cs typeface="맑은 고딕" pitchFamily="34" charset="-120"/>
               </a:rPr>
-              <a:t>사람이 손으로 채우는 서식 아홉 가지도 화면에서 바로 뽑습니다</a:t>
+              <a:t>사람이 손으로 채워야 하는 서식 아홉 가지도, 찾아다닐 것 없이 화면에서 바로 뽑습니다</a:t>
             </a:r>
             <a:endParaRPr lang="en-US" sz="1900" dirty="0"/>
           </a:p>
@@ -6942,7 +6942,7 @@
                 <a:ea typeface="맑은 고딕" pitchFamily="34" charset="-122"/>
                 <a:cs typeface="맑은 고딕" pitchFamily="34" charset="-120"/>
               </a:rPr>
-              <a:t>컴퓨터가 모자라거나 정전일 때는 시험지를 뽑아 종이로 칩니다</a:t>
+              <a:t>컴퓨터가 모자라거나 정전이 나도 시험은 칩니다. 시험지를 뽑아 종이로 하면 됩니다</a:t>
             </a:r>
             <a:endParaRPr lang="en-US" sz="1900" dirty="0"/>
           </a:p>
@@ -7127,7 +7127,7 @@
                 <a:ea typeface="맑은 고딕" pitchFamily="34" charset="-122"/>
                 <a:cs typeface="맑은 고딕" pitchFamily="34" charset="-120"/>
               </a:rPr>
-              <a:t>회사 로고와 이름, 시험 종목, NDE Level,</a:t>
+              <a:t>회사 마크와 이름, 시험 종목, 등급, 쪽 번호가</a:t>
             </a:r>
             <a:endParaRPr lang="en-US" sz="1250" dirty="0"/>
           </a:p>
@@ -7147,7 +7147,7 @@
                 <a:ea typeface="맑은 고딕" pitchFamily="34" charset="-122"/>
                 <a:cs typeface="맑은 고딕" pitchFamily="34" charset="-120"/>
               </a:rPr>
-              <a:t>쪽 번호가 모든 장에 붙는다</a:t>
+              <a:t>모든 장에 붙습니다</a:t>
             </a:r>
             <a:endParaRPr lang="en-US" sz="1250" dirty="0"/>
           </a:p>
@@ -7447,7 +7447,7 @@
                 <a:ea typeface="맑은 고딕" pitchFamily="34" charset="-122"/>
                 <a:cs typeface="맑은 고딕" pitchFamily="34" charset="-120"/>
               </a:rPr>
-              <a:t>그 시험에 제공되는 참고자료를 밝힌다.</a:t>
+              <a:t>그 시험에 무엇을 참고할 수 있는지 밝혀 둡니다.</a:t>
             </a:r>
             <a:endParaRPr lang="en-US" sz="1250" dirty="0"/>
           </a:p>
@@ -7467,7 +7467,7 @@
                 <a:ea typeface="맑은 고딕" pitchFamily="34" charset="-122"/>
                 <a:cs typeface="맑은 고딕" pitchFamily="34" charset="-120"/>
               </a:rPr>
-              <a:t>다섯 유형으로 나눠 두었다 (E02 5.3.2)</a:t>
+              <a:t>시험마다 달라서 다섯 갈래로 나눠 두었습니다</a:t>
             </a:r>
             <a:endParaRPr lang="en-US" sz="1250" dirty="0"/>
           </a:p>
@@ -7607,7 +7607,7 @@
                 <a:ea typeface="맑은 고딕" pitchFamily="34" charset="-122"/>
                 <a:cs typeface="맑은 고딕" pitchFamily="34" charset="-120"/>
               </a:rPr>
-              <a:t>회사 로고를 가운데에 옅게 깐다.</a:t>
+              <a:t>회사 마크를 가운데에 옅게 깝니다.</a:t>
             </a:r>
             <a:endParaRPr lang="en-US" sz="1250" dirty="0"/>
           </a:p>
@@ -7627,7 +7627,7 @@
                 <a:ea typeface="맑은 고딕" pitchFamily="34" charset="-122"/>
                 <a:cs typeface="맑은 고딕" pitchFamily="34" charset="-120"/>
               </a:rPr>
-              <a:t>글씨를 가리지 않는 농도로 맞췄다</a:t>
+              <a:t>글씨를 가리지 않을 만큼만 넣었습니다</a:t>
             </a:r>
             <a:endParaRPr lang="en-US" sz="1250" dirty="0"/>
           </a:p>
@@ -7806,7 +7806,7 @@
                 <a:ea typeface="맑은 고딕" pitchFamily="34" charset="-122"/>
                 <a:cs typeface="맑은 고딕" pitchFamily="34" charset="-120"/>
               </a:rPr>
-              <a:t>출력은 세 가지 — 시험지(백지) · 응시자가 푼 답안지 · 정답과 근거가 함께 나오는 관리자용.</a:t>
+              <a:t>뽑는 것은 세 가지입니다. 백지 시험지, 응시자가 푼 답안지, 그리고 정답과 근거가 함께 나오는 관리자용.</a:t>
             </a:r>
             <a:endParaRPr lang="en-US" sz="1350" dirty="0"/>
           </a:p>
@@ -7948,7 +7948,7 @@
                 <a:ea typeface="맑은 고딕" pitchFamily="34" charset="-122"/>
                 <a:cs typeface="맑은 고딕" pitchFamily="34" charset="-120"/>
               </a:rPr>
-              <a:t>사 온 프로그램이 아닙니다. VS Code 를 열어 한 줄씩 직접 짰습니다</a:t>
+              <a:t>어디서 사 온 것이 아닙니다. 빈 화면에서 시작해 한 줄씩 쌓아 올린 것입니다</a:t>
             </a:r>
             <a:endParaRPr lang="en-US" sz="1900" dirty="0"/>
           </a:p>
@@ -8110,7 +8110,7 @@
                 <a:ea typeface="맑은 고딕" pitchFamily="34" charset="-122"/>
                 <a:cs typeface="맑은 고딕" pitchFamily="34" charset="-120"/>
               </a:rPr>
-              <a:t>시험 보는 화면, 채점, 자격 이력, 인쇄</a:t>
+              <a:t>시험 보는 화면과 채점, 자격 이력, 인쇄까지</a:t>
             </a:r>
             <a:endParaRPr lang="en-US" sz="1250" dirty="0"/>
           </a:p>
@@ -8227,7 +8227,7 @@
                 <a:ea typeface="맑은 고딕" pitchFamily="34" charset="-122"/>
                 <a:cs typeface="맑은 고딕" pitchFamily="34" charset="-120"/>
               </a:rPr>
-              <a:t>도구 131개 — 한글 시험지를 옮기고 틀린 데를 찾는다</a:t>
+              <a:t>도구 131개 — 시험지를 옮기고 틀린 데를 찾는 것들</a:t>
             </a:r>
             <a:endParaRPr lang="en-US" sz="1250" dirty="0"/>
           </a:p>
@@ -8344,7 +8344,7 @@
                 <a:ea typeface="맑은 고딕" pitchFamily="34" charset="-122"/>
                 <a:cs typeface="맑은 고딕" pitchFamily="34" charset="-120"/>
               </a:rPr>
-              <a:t>종이에 뽑을 때의 모양 — 시험지·답안지·서식</a:t>
+              <a:t>종이에 뽑았을 때의 모양 — 시험지와 답안지, 서식</a:t>
             </a:r>
             <a:endParaRPr lang="en-US" sz="1250" dirty="0"/>
           </a:p>
@@ -8461,7 +8461,7 @@
                 <a:ea typeface="맑은 고딕" pitchFamily="34" charset="-122"/>
                 <a:cs typeface="맑은 고딕" pitchFamily="34" charset="-120"/>
               </a:rPr>
-              <a:t>필기시험 시행 규칙과 자격증 관리 규칙</a:t>
+              <a:t>새로 지은 규칙 문서 두 건</a:t>
             </a:r>
             <a:endParaRPr lang="en-US" sz="1250" dirty="0"/>
           </a:p>
@@ -8567,7 +8567,7 @@
                 <a:ea typeface="맑은 고딕" pitchFamily="34" charset="-122"/>
                 <a:cs typeface="맑은 고딕" pitchFamily="34" charset="-120"/>
               </a:rPr>
-              <a:t>2026년 7월 23일부터 8월 28일까지 3주 동안,</a:t>
+              <a:t>7월 23일에 시작해 8월 28일에 지금 모습이 되었습니다.</a:t>
             </a:r>
             <a:endParaRPr lang="en-US" sz="1150" dirty="0"/>
           </a:p>
@@ -8587,7 +8587,7 @@
                 <a:ea typeface="맑은 고딕" pitchFamily="34" charset="-122"/>
                 <a:cs typeface="맑은 고딕" pitchFamily="34" charset="-120"/>
               </a:rPr>
-              <a:t>고쳐서 올린 것만 207번. 그 사이 수천 번 고쳤습니다.</a:t>
+              <a:t>고쳐서 올린 것만 207번이고, 그 사이에 고친 것은 셀 수 없습니다.</a:t>
             </a:r>
             <a:endParaRPr lang="en-US" sz="1150" dirty="0"/>
           </a:p>
@@ -8626,7 +8626,7 @@
                 <a:ea typeface="맑은 고딕" pitchFamily="34" charset="-122"/>
                 <a:cs typeface="맑은 고딕" pitchFamily="34" charset="-120"/>
               </a:rPr>
-              <a:t>위 화면은 실제 파일입니다. 숫자 하나하나 옆에 「이건 규정 몇 조에서 온 값이다」를 적어 두었습니다.</a:t>
+              <a:t>왼쪽은 실제 화면입니다. 숫자마다 옆에 「이건 규정 몇 조에서 온 값이다」를 적어 두었습니다.</a:t>
             </a:r>
             <a:endParaRPr lang="en-US" sz="1350" dirty="0"/>
           </a:p>
@@ -8768,7 +8768,7 @@
                 <a:ea typeface="맑은 고딕" pitchFamily="34" charset="-122"/>
                 <a:cs typeface="맑은 고딕" pitchFamily="34" charset="-120"/>
               </a:rPr>
-              <a:t>글만 쓰는 프로그램이 아닙니다. 고치고 · 돌려 보고 · 되돌리는 일을 한자리에서 합니다</a:t>
+              <a:t>글만 적는 프로그램이 아닙니다. 고치고, 바로 돌려 보고, 잘못됐으면 되돌리는 일을 한자리에서 합니다</a:t>
             </a:r>
             <a:endParaRPr lang="en-US" sz="1900" dirty="0"/>
           </a:p>
@@ -9732,7 +9732,7 @@
                 <a:ea typeface="맑은 고딕" pitchFamily="34" charset="-122"/>
                 <a:cs typeface="맑은 고딕" pitchFamily="34" charset="-120"/>
               </a:rPr>
-              <a:t>사람이 다 기억할 수 없는 일을 프로그램이 대신 붙들어 줍니다. 그래서 혼자서도 끝까지 갈 수 있었습니다.</a:t>
+              <a:t>사람이 다 기억할 수 없는 것을 이 프로그램이 대신 붙들어 줍니다. 그 덕에 혼자서도 끝까지 갈 수 있었습니다.</a:t>
             </a:r>
             <a:endParaRPr lang="en-US" sz="1350" dirty="0"/>
           </a:p>
@@ -9874,7 +9874,7 @@
                 <a:ea typeface="맑은 고딕" pitchFamily="34" charset="-122"/>
                 <a:cs typeface="맑은 고딕" pitchFamily="34" charset="-120"/>
               </a:rPr>
-              <a:t>「한글 시험지를 옮겼습니다」 한 줄이 실제로는 이런 일이었습니다</a:t>
+              <a:t>앞에서 「시험지를 옮겼습니다」라고 한 줄로 지나갔는데, 실제로는 이런 일이었습니다</a:t>
             </a:r>
             <a:endParaRPr lang="en-US" sz="1900" dirty="0"/>
           </a:p>
@@ -10729,7 +10729,7 @@
                 <a:ea typeface="맑은 고딕" pitchFamily="34" charset="-122"/>
                 <a:cs typeface="맑은 고딕" pitchFamily="34" charset="-120"/>
               </a:rPr>
-              <a:t>옮겨 담는 일이 아니라 맞대어 보는 일이었습니다. 그래서 지금 은행에 든 답은 원본보다 앞서 있습니다.</a:t>
+              <a:t>베껴 담는 일인 줄 알았는데, 하다 보니 한 문제씩 맞대어 보는 일이었습니다. 그래서 지금 은행에 든 답은 원본보다 앞서 있습니다.</a:t>
             </a:r>
             <a:endParaRPr lang="en-US" sz="1350" dirty="0"/>
           </a:p>
@@ -10832,7 +10832,7 @@
                 <a:ea typeface="맑은 고딕" pitchFamily="34" charset="-122"/>
                 <a:cs typeface="맑은 고딕" pitchFamily="34" charset="-120"/>
               </a:rPr>
-              <a:t>WHY</a:t>
+              <a:t>예전에는 이랬습니다</a:t>
             </a:r>
             <a:endParaRPr lang="en-US" sz="3400" dirty="0"/>
           </a:p>
@@ -10871,7 +10871,7 @@
                 <a:ea typeface="맑은 고딕" pitchFamily="34" charset="-122"/>
                 <a:cs typeface="맑은 고딕" pitchFamily="34" charset="-120"/>
               </a:rPr>
-              <a:t>시험 한 번 치는 데 사람이 하던 일 여섯 가지</a:t>
+              <a:t>시험을 한 번 치르고 나면, 늘 같은 일이 되풀이됐습니다</a:t>
             </a:r>
             <a:endParaRPr lang="en-US" sz="1900" dirty="0"/>
           </a:p>
@@ -10969,7 +10969,7 @@
                 <a:ea typeface="맑은 고딕" pitchFamily="34" charset="-122"/>
                 <a:cs typeface="맑은 고딕" pitchFamily="34" charset="-120"/>
               </a:rPr>
-              <a:t>문항을 고르고 한글로 시험지를 만든다</a:t>
+              <a:t>한글을 열어 시험지부터 만듭니다</a:t>
             </a:r>
             <a:endParaRPr lang="en-US" sz="1800" dirty="0"/>
           </a:p>
@@ -11008,7 +11008,7 @@
                 <a:ea typeface="맑은 고딕" pitchFamily="34" charset="-122"/>
                 <a:cs typeface="맑은 고딕" pitchFamily="34" charset="-120"/>
               </a:rPr>
-              <a:t>회차마다 처음부터</a:t>
+              <a:t>회차가 바뀌면 또 처음부터</a:t>
             </a:r>
             <a:endParaRPr lang="en-US" sz="1400" dirty="0"/>
           </a:p>
@@ -11106,7 +11106,7 @@
                 <a:ea typeface="맑은 고딕" pitchFamily="34" charset="-122"/>
                 <a:cs typeface="맑은 고딕" pitchFamily="34" charset="-120"/>
               </a:rPr>
-              <a:t>인쇄하고 응시자 수만큼 복사한다</a:t>
+              <a:t>뽑아서 응시자 수만큼 복사합니다</a:t>
             </a:r>
             <a:endParaRPr lang="en-US" sz="1800" dirty="0"/>
           </a:p>
@@ -11145,7 +11145,7 @@
                 <a:ea typeface="맑은 고딕" pitchFamily="34" charset="-122"/>
                 <a:cs typeface="맑은 고딕" pitchFamily="34" charset="-120"/>
               </a:rPr>
-              <a:t>남은 시험지는 폐기 대장에</a:t>
+              <a:t>남은 시험지는 대장에 적어 폐기</a:t>
             </a:r>
             <a:endParaRPr lang="en-US" sz="1400" dirty="0"/>
           </a:p>
@@ -11243,7 +11243,7 @@
                 <a:ea typeface="맑은 고딕" pitchFamily="34" charset="-122"/>
                 <a:cs typeface="맑은 고딕" pitchFamily="34" charset="-120"/>
               </a:rPr>
-              <a:t>정답지를 옆에 놓고 한 장씩 채점한다</a:t>
+              <a:t>정답지를 옆에 놓고 한 장씩 맞춰 봅니다</a:t>
             </a:r>
             <a:endParaRPr lang="en-US" sz="1800" dirty="0"/>
           </a:p>
@@ -11282,7 +11282,7 @@
                 <a:ea typeface="맑은 고딕" pitchFamily="34" charset="-122"/>
                 <a:cs typeface="맑은 고딕" pitchFamily="34" charset="-120"/>
               </a:rPr>
-              <a:t>사람이 하므로 틀릴 수 있다</a:t>
+              <a:t>눈으로 하는 일이라 틀릴 수 있습니다</a:t>
             </a:r>
             <a:endParaRPr lang="en-US" sz="1400" dirty="0"/>
           </a:p>
@@ -11380,7 +11380,7 @@
                 <a:ea typeface="맑은 고딕" pitchFamily="34" charset="-122"/>
                 <a:cs typeface="맑은 고딕" pitchFamily="34" charset="-120"/>
               </a:rPr>
-              <a:t>점수를 계산해 성적표에 옮겨 적는다</a:t>
+              <a:t>점수를 세어 성적표에 옮겨 적습니다</a:t>
             </a:r>
             <a:endParaRPr lang="en-US" sz="1800" dirty="0"/>
           </a:p>
@@ -11419,7 +11419,7 @@
                 <a:ea typeface="맑은 고딕" pitchFamily="34" charset="-122"/>
                 <a:cs typeface="맑은 고딕" pitchFamily="34" charset="-120"/>
               </a:rPr>
-              <a:t>종합점수는 계산기로</a:t>
+              <a:t>평균은 계산기를 두드려서</a:t>
             </a:r>
             <a:endParaRPr lang="en-US" sz="1400" dirty="0"/>
           </a:p>
@@ -11517,7 +11517,7 @@
                 <a:ea typeface="맑은 고딕" pitchFamily="34" charset="-122"/>
                 <a:cs typeface="맑은 고딕" pitchFamily="34" charset="-120"/>
               </a:rPr>
-              <a:t>파일철에 보관한다</a:t>
+              <a:t>파일철에 꽂아 둡니다</a:t>
             </a:r>
             <a:endParaRPr lang="en-US" sz="1800" dirty="0"/>
           </a:p>
@@ -11556,7 +11556,7 @@
                 <a:ea typeface="맑은 고딕" pitchFamily="34" charset="-122"/>
                 <a:cs typeface="맑은 고딕" pitchFamily="34" charset="-120"/>
               </a:rPr>
-              <a:t>찾으려면 뒤져야 한다</a:t>
+              <a:t>나중에 찾으려면 한 장씩 넘겨야 합니다</a:t>
             </a:r>
             <a:endParaRPr lang="en-US" sz="1400" dirty="0"/>
           </a:p>
@@ -11654,7 +11654,7 @@
                 <a:ea typeface="맑은 고딕" pitchFamily="34" charset="-122"/>
                 <a:cs typeface="맑은 고딕" pitchFamily="34" charset="-120"/>
               </a:rPr>
-              <a:t>자격 만료를 달력에 적어 두고 챙긴다</a:t>
+              <a:t>만료일은 달력에 적어 두고 챙깁니다</a:t>
             </a:r>
             <a:endParaRPr lang="en-US" sz="1800" dirty="0"/>
           </a:p>
@@ -11693,7 +11693,7 @@
                 <a:ea typeface="맑은 고딕" pitchFamily="34" charset="-122"/>
                 <a:cs typeface="맑은 고딕" pitchFamily="34" charset="-120"/>
               </a:rPr>
-              <a:t>놓치면 자격 없이 검사한 것이 된다</a:t>
+              <a:t>여기서 놓치면 자격 없이 검사한 셈이 됩니다</a:t>
             </a:r>
             <a:endParaRPr lang="en-US" sz="1400" dirty="0"/>
           </a:p>
@@ -11757,7 +11757,7 @@
                 <a:ea typeface="맑은 고딕" pitchFamily="34" charset="-122"/>
                 <a:cs typeface="맑은 고딕" pitchFamily="34" charset="-120"/>
               </a:rPr>
-              <a:t>문제은행에 든 문항이 규정 출제 수와 똑같아, 회차마다 같은 문제가 그대로 나갔습니다.</a:t>
+              <a:t>게다가 은행에 든 문항 수가 규정이 정한 출제 수와 꼭 같아서, 회차가 바뀌어도 같은 문제가 그대로 나갔습니다.</a:t>
             </a:r>
             <a:endParaRPr lang="en-US" sz="1700" dirty="0"/>
           </a:p>
@@ -11899,7 +11899,7 @@
                 <a:ea typeface="맑은 고딕" pitchFamily="34" charset="-122"/>
                 <a:cs typeface="맑은 고딕" pitchFamily="34" charset="-120"/>
               </a:rPr>
-              <a:t>자격인정 규정을 펴 놓고, 조항 하나하나가 프로그램의 어느 자리가 될지 정했습니다</a:t>
+              <a:t>우리 절차서를 책상에 펴 놓고, 조항 하나하나가 프로그램의 어느 자리가 될지 짝을 지었습니다</a:t>
             </a:r>
             <a:endParaRPr lang="en-US" sz="1900" dirty="0"/>
           </a:p>
@@ -14216,7 +14216,7 @@
                 <a:ea typeface="맑은 고딕" pitchFamily="34" charset="-122"/>
                 <a:cs typeface="맑은 고딕" pitchFamily="34" charset="-120"/>
               </a:rPr>
-              <a:t>숫자를 코드 안에 그냥 적어 두지 않았습니다. 이름을 붙여 한자리에 모으고, 그 옆에 「이건 규정 몇 조에서 온 값이다」를 적었습니다.</a:t>
+              <a:t>숫자를 아무 데나 적어 두지 않았습니다. 이름을 붙여 한자리에 모으고, 그 옆에 어느 조항에서 온 값인지를 함께 적었습니다.</a:t>
             </a:r>
             <a:endParaRPr lang="en-US" sz="1350" dirty="0"/>
           </a:p>
@@ -14358,7 +14358,7 @@
                 <a:ea typeface="맑은 고딕" pitchFamily="34" charset="-122"/>
                 <a:cs typeface="맑은 고딕" pitchFamily="34" charset="-120"/>
               </a:rPr>
-              <a:t>규정을 먼저 읽고, 시험지를 옮기고, 그 다음에 화면을 만들었습니다</a:t>
+              <a:t>화면부터 만들고 싶은 마음을 눌렀습니다. 규정을 먼저 읽고, 시험지를 옮긴 다음에야 화면을 만들었습니다</a:t>
             </a:r>
             <a:endParaRPr lang="en-US" sz="1900" dirty="0"/>
           </a:p>
@@ -14481,7 +14481,7 @@
                 <a:ea typeface="맑은 고딕" pitchFamily="34" charset="-122"/>
                 <a:cs typeface="맑은 고딕" pitchFamily="34" charset="-120"/>
               </a:rPr>
-              <a:t>규정을 먼저 읽었다</a:t>
+              <a:t>규정을 먼저 읽었습니다</a:t>
             </a:r>
             <a:endParaRPr lang="en-US" sz="1800" dirty="0"/>
           </a:p>
@@ -15659,7 +15659,7 @@
                 <a:ea typeface="맑은 고딕" pitchFamily="34" charset="-122"/>
                 <a:cs typeface="맑은 고딕" pitchFamily="34" charset="-120"/>
               </a:rPr>
-              <a:t>종이 시험지를 한 문제씩 옮겨 담고, 규정이 요구하는 수보다 넉넉히 채웠습니다</a:t>
+              <a:t>한 문제씩 옮겨 담고, 규정이 요구하는 수보다 넉넉히 채웠습니다</a:t>
             </a:r>
             <a:endParaRPr lang="en-US" sz="1900" dirty="0"/>
           </a:p>
@@ -15879,7 +15879,7 @@
                 <a:ea typeface="맑은 고딕" pitchFamily="34" charset="-122"/>
                 <a:cs typeface="맑은 고딕" pitchFamily="34" charset="-120"/>
               </a:rPr>
-              <a:t>한 종목에 60문제씩. 시험에는 40문제만 나간다</a:t>
+              <a:t>한 종목에 60문제씩 두고, 시험에는 40문제만 내보냅니다</a:t>
             </a:r>
             <a:endParaRPr lang="en-US" sz="1250" dirty="0"/>
           </a:p>
@@ -16099,7 +16099,7 @@
                 <a:ea typeface="맑은 고딕" pitchFamily="34" charset="-122"/>
                 <a:cs typeface="맑은 고딕" pitchFamily="34" charset="-120"/>
               </a:rPr>
-              <a:t>한 종목에 26~45문제. 시험에는 20~30문제</a:t>
+              <a:t>한 종목에 26~45문제를 두고, 시험에는 20~30문제만</a:t>
             </a:r>
             <a:endParaRPr lang="en-US" sz="1250" dirty="0"/>
           </a:p>
@@ -16810,7 +16810,7 @@
                 <a:ea typeface="맑은 고딕" pitchFamily="34" charset="-122"/>
                 <a:cs typeface="맑은 고딕" pitchFamily="34" charset="-120"/>
               </a:rPr>
-              <a:t>문제와 보기 차례를 시험마다 바꿉니다 — 규정이 그렇게 하라고 정하고 있습니다</a:t>
+              <a:t>문제도 보기 차례도 시험마다 바뀝니다. 규정이 그렇게 하라고 정해 두고 있습니다</a:t>
             </a:r>
             <a:endParaRPr lang="en-US" sz="1900" dirty="0"/>
           </a:p>
@@ -16952,7 +16952,7 @@
                 <a:ea typeface="맑은 고딕" pitchFamily="34" charset="-122"/>
                 <a:cs typeface="맑은 고딕" pitchFamily="34" charset="-120"/>
               </a:rPr>
-              <a:t>60문제 중에 40개를 뽑는 방법이 이만큼입니다. 여기에 보기 차례까지 섞으니, 같은 시험지가 두 번 나올 일이 없습니다.</a:t>
+              <a:t>60문제에서 40개를 뽑는 방법만 세어도 이만큼입니다. 여기에 보기 차례까지 섞이니, 같은 시험지가 두 번 나올 일은 사실상 없습니다.</a:t>
             </a:r>
             <a:endParaRPr lang="en-US" sz="1350" dirty="0"/>
           </a:p>
@@ -17242,7 +17242,7 @@
                 <a:ea typeface="맑은 고딕" pitchFamily="34" charset="-122"/>
                 <a:cs typeface="맑은 고딕" pitchFamily="34" charset="-120"/>
               </a:rPr>
-              <a:t>「위 모두 정답」처럼 자리를</a:t>
+              <a:t>「위 모두 정답」처럼 자리를 옮기면</a:t>
             </a:r>
             <a:endParaRPr lang="en-US" sz="1250" dirty="0"/>
           </a:p>
@@ -17262,7 +17262,7 @@
                 <a:ea typeface="맑은 고딕" pitchFamily="34" charset="-122"/>
                 <a:cs typeface="맑은 고딕" pitchFamily="34" charset="-120"/>
               </a:rPr>
-              <a:t>옮기면 말이 안 되는 것</a:t>
+              <a:t>말이 안 되는 것은 붙들어 둡니다</a:t>
             </a:r>
             <a:endParaRPr lang="en-US" sz="1250" dirty="0"/>
           </a:p>
@@ -17407,7 +17407,7 @@
                 <a:ea typeface="맑은 고딕" pitchFamily="34" charset="-122"/>
                 <a:cs typeface="맑은 고딕" pitchFamily="34" charset="-120"/>
               </a:rPr>
-              <a:t>보기를 섞어도 채점이</a:t>
+              <a:t>섞어도 채점이 어긋나지 않는지</a:t>
             </a:r>
             <a:endParaRPr lang="en-US" sz="1250" dirty="0"/>
           </a:p>
@@ -17427,7 +17427,7 @@
                 <a:ea typeface="맑은 고딕" pitchFamily="34" charset="-122"/>
                 <a:cs typeface="맑은 고딕" pitchFamily="34" charset="-120"/>
               </a:rPr>
-              <a:t>어긋나지 않는지 확인</a:t>
+              <a:t>돌려 보며 확인했습니다</a:t>
             </a:r>
             <a:endParaRPr lang="en-US" sz="1250" dirty="0"/>
           </a:p>
@@ -17569,7 +17569,7 @@
                 <a:ea typeface="맑은 고딕" pitchFamily="34" charset="-122"/>
                 <a:cs typeface="맑은 고딕" pitchFamily="34" charset="-120"/>
               </a:rPr>
-              <a:t>프로그램 안의 숫자는 전부 규정에서 가져온 것입니다. 제가 정한 것이 없습니다</a:t>
+              <a:t>프로그램 안의 숫자는 전부 규정에서 가져왔습니다. 제가 마음대로 정한 값은 하나도 없습니다</a:t>
             </a:r>
             <a:endParaRPr lang="en-US" sz="1900" dirty="0"/>
           </a:p>
@@ -18475,7 +18475,7 @@
                 <a:ea typeface="맑은 고딕" pitchFamily="34" charset="-122"/>
                 <a:cs typeface="맑은 고딕" pitchFamily="34" charset="-120"/>
               </a:rPr>
-              <a:t>문제를 하나라도 고치면, 어디가 틀어졌는지 프로그램이 스스로 찾아냅니다</a:t>
+              <a:t>고칠 때마다 사람이 다 확인할 수는 없었습니다. 그래서 확인하는 일 자체를 프로그램으로 만들었습니다</a:t>
             </a:r>
             <a:endParaRPr lang="en-US" sz="1900" dirty="0"/>
           </a:p>
@@ -20021,7 +20021,7 @@
                 <a:ea typeface="맑은 고딕" pitchFamily="34" charset="-122"/>
                 <a:cs typeface="맑은 고딕" pitchFamily="34" charset="-120"/>
               </a:rPr>
-              <a:t>고친 것이 응시자 화면까지 어떻게 가는지, 푼 결과가 어디에 쌓이는지</a:t>
+              <a:t>고친 것이 응시자 화면까지 어떻게 가는지, 그리고 푼 결과가 어디에 쌓이는지</a:t>
             </a:r>
             <a:endParaRPr lang="en-US" sz="1900" dirty="0"/>
           </a:p>
@@ -20186,7 +20186,7 @@
                 <a:ea typeface="맑은 고딕" pitchFamily="34" charset="-122"/>
                 <a:cs typeface="맑은 고딕" pitchFamily="34" charset="-120"/>
               </a:rPr>
-              <a:t>내 컴퓨터에서 문제나 규정 값을 고친다</a:t>
+              <a:t>제 컴퓨터에서 문제나 규정 값을 고칩니다</a:t>
             </a:r>
             <a:endParaRPr lang="en-US" sz="1350" dirty="0"/>
           </a:p>
@@ -20429,7 +20429,7 @@
                 <a:ea typeface="맑은 고딕" pitchFamily="34" charset="-122"/>
                 <a:cs typeface="맑은 고딕" pitchFamily="34" charset="-120"/>
               </a:rPr>
-              <a:t>틀린 데가 없는지 검사하고 인터넷에 올린다</a:t>
+              <a:t>틀린 데가 없는지 검사하고 올립니다</a:t>
             </a:r>
             <a:endParaRPr lang="en-US" sz="1350" dirty="0"/>
           </a:p>
@@ -20672,7 +20672,7 @@
                 <a:ea typeface="맑은 고딕" pitchFamily="34" charset="-122"/>
                 <a:cs typeface="맑은 고딕" pitchFamily="34" charset="-120"/>
               </a:rPr>
-              <a:t>올리면 저절로 웹사이트에 붙는다 — 2~3분</a:t>
+              <a:t>올리면 2~3분 뒤에 저절로 웹사이트에 붙습니다</a:t>
             </a:r>
             <a:endParaRPr lang="en-US" sz="1350" dirty="0"/>
           </a:p>
@@ -20876,7 +20876,7 @@
                 <a:ea typeface="맑은 고딕" pitchFamily="34" charset="-122"/>
                 <a:cs typeface="맑은 고딕" pitchFamily="34" charset="-120"/>
               </a:rPr>
-              <a:t>응시자가 주소를 열어 시험을 친다</a:t>
+              <a:t>응시자는 주소만 열면 됩니다</a:t>
             </a:r>
             <a:endParaRPr lang="en-US" sz="1350" dirty="0"/>
           </a:p>
@@ -21119,7 +21119,7 @@
                 <a:ea typeface="맑은 고딕" pitchFamily="34" charset="-122"/>
                 <a:cs typeface="맑은 고딕" pitchFamily="34" charset="-120"/>
               </a:rPr>
-              <a:t>제출하면 구글 스프레드시트에 한 줄이 쌓인다</a:t>
+              <a:t>제출하는 순간 기록이 한 줄 쌓입니다</a:t>
             </a:r>
             <a:endParaRPr lang="en-US" sz="1350" dirty="0"/>
           </a:p>
@@ -21362,7 +21362,7 @@
                 <a:ea typeface="맑은 고딕" pitchFamily="34" charset="-122"/>
                 <a:cs typeface="맑은 고딕" pitchFamily="34" charset="-120"/>
               </a:rPr>
-              <a:t>관리자가 결과와 자격 이력을 본다</a:t>
+              <a:t>관리자는 그 자리에서 결과와 자격 이력을 봅니다</a:t>
             </a:r>
             <a:endParaRPr lang="en-US" sz="1350" dirty="0"/>
           </a:p>
@@ -21582,7 +21582,7 @@
                 <a:ea typeface="맑은 고딕" pitchFamily="34" charset="-122"/>
                 <a:cs typeface="맑은 고딕" pitchFamily="34" charset="-120"/>
               </a:rPr>
-              <a:t>옮기려면 규정을 한 줄씩 다시 읽어야 했습니다. 그러다 드러난 것들입니다</a:t>
+              <a:t>옮기려니 규정을 한 줄씩 다시 읽어야 했습니다. 찾으려고 한 것이 아니라, 읽다 보니 드러난 것들입니다</a:t>
             </a:r>
             <a:endParaRPr lang="en-US" sz="1900" dirty="0"/>
           </a:p>
@@ -21749,7 +21749,7 @@
                 <a:ea typeface="맑은 고딕" pitchFamily="34" charset="-122"/>
                 <a:cs typeface="맑은 고딕" pitchFamily="34" charset="-120"/>
               </a:rPr>
-              <a:t>전 종목을 일반 40 · 전문 25로 못 박아 두었다.</a:t>
+              <a:t>모든 종목을 일반 40 · 전문 25로 못 박아 두고 있었습니다.</a:t>
             </a:r>
             <a:endParaRPr lang="en-US" sz="1400" dirty="0"/>
           </a:p>
@@ -21955,7 +21955,7 @@
                 <a:ea typeface="맑은 고딕" pitchFamily="34" charset="-122"/>
                 <a:cs typeface="맑은 고딕" pitchFamily="34" charset="-120"/>
               </a:rPr>
-              <a:t>출제 수를 정하지 않아 은행 전체가 나갔다.</a:t>
+              <a:t>출제 수를 정해 두지 않아 은행에 든 것이 전부 나갔습니다.</a:t>
             </a:r>
             <a:endParaRPr lang="en-US" sz="1400" dirty="0"/>
           </a:p>
@@ -22161,7 +22161,7 @@
                 <a:ea typeface="맑은 고딕" pitchFamily="34" charset="-122"/>
                 <a:cs typeface="맑은 고딕" pitchFamily="34" charset="-120"/>
               </a:rPr>
-              <a:t>은행에 든 문항이 규정 출제 수와 똑같았다.</a:t>
+              <a:t>은행에 든 문항 수가 규정 출제 수와 꼭 같았습니다.</a:t>
             </a:r>
             <a:endParaRPr lang="en-US" sz="1400" dirty="0"/>
           </a:p>
@@ -22200,7 +22200,7 @@
                 <a:ea typeface="맑은 고딕" pitchFamily="34" charset="-122"/>
                 <a:cs typeface="맑은 고딕" pitchFamily="34" charset="-120"/>
               </a:rPr>
-              <a:t>→ 뽑을 것이 없으니 있는 문항이 전부 나간다</a:t>
+              <a:t>→ 뽑고 말고 할 것이 없으니 있는 대로 다 나갑니다</a:t>
             </a:r>
             <a:endParaRPr lang="en-US" sz="1300" dirty="0"/>
           </a:p>
@@ -22381,7 +22381,7 @@
                 <a:ea typeface="맑은 고딕" pitchFamily="34" charset="-122"/>
                 <a:cs typeface="맑은 고딕" pitchFamily="34" charset="-120"/>
               </a:rPr>
-              <a:t>바로 할 수 있는 것과, 규정부터 고쳐야 하는 것을 나눴습니다</a:t>
+              <a:t>바로 할 수 있는 것과, 규정부터 손봐야 하는 것을 나눠 두었습니다</a:t>
             </a:r>
             <a:endParaRPr lang="en-US" sz="1900" dirty="0"/>
           </a:p>
@@ -22562,7 +22562,7 @@
                 <a:ea typeface="맑은 고딕" pitchFamily="34" charset="-122"/>
                 <a:cs typeface="맑은 고딕" pitchFamily="34" charset="-120"/>
               </a:rPr>
-              <a:t>지금은 검토하려고 문제가 전부 보이게 해 두었다. 무작위로 나오게 바꾼다</a:t>
+              <a:t>지금은 검토하려고 문제가 전부 보이게 해 두었습니다. 시험 전에 무작위로 바꿔야 합니다</a:t>
             </a:r>
             <a:endParaRPr lang="en-US" sz="1250" dirty="0"/>
           </a:p>
@@ -22704,7 +22704,7 @@
                 <a:ea typeface="맑은 고딕" pitchFamily="34" charset="-122"/>
                 <a:cs typeface="맑은 고딕" pitchFamily="34" charset="-120"/>
               </a:rPr>
-              <a:t>규정이 65문제인데 은행에도 65문제뿐이라 늘 같은 시험이 나간다</a:t>
+              <a:t>규정이 65문제인데 은행에도 65문제뿐이라, 늘 같은 시험이 나갑니다</a:t>
             </a:r>
             <a:endParaRPr lang="en-US" sz="1250" dirty="0"/>
           </a:p>
@@ -22846,7 +22846,7 @@
                 <a:ea typeface="맑은 고딕" pitchFamily="34" charset="-122"/>
                 <a:cs typeface="맑은 고딕" pitchFamily="34" charset="-120"/>
               </a:rPr>
-              <a:t>지금은 프로그램 안에 들어 있어 마음먹으면 볼 수 있다</a:t>
+              <a:t>지금은 프로그램 안에 들어 있어, 마음먹으면 들여다볼 수 있습니다</a:t>
             </a:r>
             <a:endParaRPr lang="en-US" sz="1250" dirty="0"/>
           </a:p>
@@ -22988,7 +22988,7 @@
                 <a:ea typeface="맑은 고딕" pitchFamily="34" charset="-122"/>
                 <a:cs typeface="맑은 고딕" pitchFamily="34" charset="-120"/>
               </a:rPr>
-              <a:t>비어 있으면 시력 만료를 계산할 수 없다</a:t>
+              <a:t>비어 있으면 시력 만료를 셀 수가 없습니다</a:t>
             </a:r>
             <a:endParaRPr lang="en-US" sz="1250" dirty="0"/>
           </a:p>
@@ -23133,7 +23133,7 @@
                 <a:ea typeface="맑은 고딕" pitchFamily="34" charset="-122"/>
                 <a:cs typeface="맑은 고딕" pitchFamily="34" charset="-120"/>
               </a:rPr>
-              <a:t>규정이 종이로 치도록 정하고 있어 규정부터 고쳐야 한다</a:t>
+              <a:t>규정이 종이로 치도록 정해 두어서, 규정부터 고쳐야 합니다</a:t>
             </a:r>
             <a:endParaRPr lang="en-US" sz="1200" dirty="0"/>
           </a:p>
@@ -23239,7 +23239,7 @@
                 <a:ea typeface="맑은 고딕" pitchFamily="34" charset="-122"/>
                 <a:cs typeface="맑은 고딕" pitchFamily="34" charset="-120"/>
               </a:rPr>
-              <a:t>이 프로그램은 필기시험만 다룬다</a:t>
+              <a:t>이 프로그램은 필기시험까지만 다룹니다</a:t>
             </a:r>
             <a:endParaRPr lang="en-US" sz="1200" dirty="0"/>
           </a:p>
@@ -23443,7 +23443,7 @@
                 <a:ea typeface="맑은 고딕" pitchFamily="34" charset="-122"/>
                 <a:cs typeface="맑은 고딕" pitchFamily="34" charset="-120"/>
               </a:rPr>
-              <a:t>첫 줄 — 실제 시험을 치기 전에 반드시 바꿔야 합니다.</a:t>
+              <a:t>첫 줄은 실제 시험을 치기 전에 반드시 바꿔야 합니다.</a:t>
             </a:r>
             <a:endParaRPr lang="en-US" sz="1350" dirty="0"/>
           </a:p>
@@ -24032,7 +24032,7 @@
                 <a:ea typeface="맑은 고딕" pitchFamily="34" charset="-122"/>
                 <a:cs typeface="맑은 고딕" pitchFamily="34" charset="-120"/>
               </a:rPr>
-              <a:t>값 하나하나가 규정 어느 조항에서 왔는지 적혀 있습니다. 사 온 프로그램이 아니라 우리가 만든 것이라, 우리가 고칠 수 있습니다.</a:t>
+              <a:t>값 하나하나가 규정 어느 조항에서 왔는지 적혀 있습니다. 사 온 것이 아니라 우리가 만든 것이라, 앞으로도 우리 손으로 고쳐 나갈 수 있습니다.</a:t>
             </a:r>
             <a:endParaRPr lang="en-US" sz="1400" dirty="0"/>
           </a:p>
@@ -24174,7 +24174,7 @@
                 <a:ea typeface="맑은 고딕" pitchFamily="34" charset="-122"/>
                 <a:cs typeface="맑은 고딕" pitchFamily="34" charset="-120"/>
               </a:rPr>
-              <a:t>3주 동안, 사 온 것 없이, 유지비 없이</a:t>
+              <a:t>여름 3주 동안 만들었습니다. 사 온 것도, 달마다 나가는 돈도 없습니다</a:t>
             </a:r>
             <a:endParaRPr lang="en-US" sz="1900" dirty="0"/>
           </a:p>
@@ -24319,7 +24319,7 @@
                 <a:ea typeface="맑은 고딕" pitchFamily="34" charset="-122"/>
                 <a:cs typeface="맑은 고딕" pitchFamily="34" charset="-120"/>
               </a:rPr>
-              <a:t>종이 시험지를 전부 옮겨 담고</a:t>
+              <a:t>종이에 있던 문항을 하나도 빼지 않고</a:t>
             </a:r>
             <a:endParaRPr lang="en-US" sz="1250" dirty="0"/>
           </a:p>
@@ -24339,7 +24339,7 @@
                 <a:ea typeface="맑은 고딕" pitchFamily="34" charset="-122"/>
                 <a:cs typeface="맑은 고딕" pitchFamily="34" charset="-120"/>
               </a:rPr>
-              <a:t>규정 수보다 넉넉히 채웠다</a:t>
+              <a:t>옮겨 담고, 모자란 데는 채웠습니다</a:t>
             </a:r>
             <a:endParaRPr lang="en-US" sz="1250" dirty="0"/>
           </a:p>
@@ -24504,7 +24504,7 @@
                 <a:ea typeface="맑은 고딕" pitchFamily="34" charset="-122"/>
                 <a:cs typeface="맑은 고딕" pitchFamily="34" charset="-120"/>
               </a:rPr>
-              <a:t>문제가 다르다</a:t>
+              <a:t>문제도 보기 차례도 다릅니다</a:t>
             </a:r>
             <a:endParaRPr lang="en-US" sz="1250" dirty="0"/>
           </a:p>
@@ -24649,7 +24649,7 @@
                 <a:ea typeface="맑은 고딕" pitchFamily="34" charset="-122"/>
                 <a:cs typeface="맑은 고딕" pitchFamily="34" charset="-120"/>
               </a:rPr>
-              <a:t>자격인정 규정의 시험 관련 조항을</a:t>
+              <a:t>우리 절차서에서 시험에 관한 것을</a:t>
             </a:r>
             <a:endParaRPr lang="en-US" sz="1250" dirty="0"/>
           </a:p>
@@ -24669,7 +24669,7 @@
                 <a:ea typeface="맑은 고딕" pitchFamily="34" charset="-122"/>
                 <a:cs typeface="맑은 고딕" pitchFamily="34" charset="-120"/>
               </a:rPr>
-              <a:t>하나도 빠짐없이 옮겼다</a:t>
+              <a:t>하나도 빠뜨리지 않고 옮겼습니다</a:t>
             </a:r>
             <a:endParaRPr lang="en-US" sz="1250" dirty="0"/>
           </a:p>
@@ -24814,7 +24814,7 @@
                 <a:ea typeface="맑은 고딕" pitchFamily="34" charset="-122"/>
                 <a:cs typeface="맑은 고딕" pitchFamily="34" charset="-120"/>
               </a:rPr>
-              <a:t>고칠 때마다 어디가 틀어졌는지</a:t>
+              <a:t>어디를 고쳐도 어긋난 데를</a:t>
             </a:r>
             <a:endParaRPr lang="en-US" sz="1250" dirty="0"/>
           </a:p>
@@ -24834,7 +24834,7 @@
                 <a:ea typeface="맑은 고딕" pitchFamily="34" charset="-122"/>
                 <a:cs typeface="맑은 고딕" pitchFamily="34" charset="-120"/>
               </a:rPr>
-              <a:t>프로그램이 스스로 찾는다</a:t>
+              <a:t>프로그램이 스스로 찾아 줍니다</a:t>
             </a:r>
             <a:endParaRPr lang="en-US" sz="1250" dirty="0"/>
           </a:p>
@@ -24979,7 +24979,7 @@
                 <a:ea typeface="맑은 고딕" pitchFamily="34" charset="-122"/>
                 <a:cs typeface="맑은 고딕" pitchFamily="34" charset="-120"/>
               </a:rPr>
-              <a:t>3주 동안 고친 양.</a:t>
+              <a:t>3주 동안 고친 양입니다.</a:t>
             </a:r>
             <a:endParaRPr lang="en-US" sz="1250" dirty="0"/>
           </a:p>
@@ -24999,7 +24999,7 @@
                 <a:ea typeface="맑은 고딕" pitchFamily="34" charset="-122"/>
                 <a:cs typeface="맑은 고딕" pitchFamily="34" charset="-120"/>
               </a:rPr>
-              <a:t>VS Code 로 직접 짰다</a:t>
+              <a:t>한 줄씩 직접 짰습니다</a:t>
             </a:r>
             <a:endParaRPr lang="en-US" sz="1250" dirty="0"/>
           </a:p>
@@ -25144,7 +25144,7 @@
                 <a:ea typeface="맑은 고딕" pitchFamily="34" charset="-122"/>
                 <a:cs typeface="맑은 고딕" pitchFamily="34" charset="-120"/>
               </a:rPr>
-              <a:t>서버를 사지 않았다.</a:t>
+              <a:t>서버를 사지 않았습니다.</a:t>
             </a:r>
             <a:endParaRPr lang="en-US" sz="1250" dirty="0"/>
           </a:p>
@@ -25164,7 +25164,7 @@
                 <a:ea typeface="맑은 고딕" pitchFamily="34" charset="-122"/>
                 <a:cs typeface="맑은 고딕" pitchFamily="34" charset="-120"/>
               </a:rPr>
-              <a:t>유지비가 들지 않는다</a:t>
+              <a:t>달마다 나가는 돈이 없습니다</a:t>
             </a:r>
             <a:endParaRPr lang="en-US" sz="1250" dirty="0"/>
           </a:p>
@@ -25203,7 +25203,7 @@
                 <a:ea typeface="맑은 고딕" pitchFamily="34" charset="-122"/>
                 <a:cs typeface="맑은 고딕" pitchFamily="34" charset="-120"/>
               </a:rPr>
-              <a:t>그리고 옮기는 동안, 규정과 어긋나 있던 것 셋을 찾아 바로잡았습니다.</a:t>
+              <a:t>그리고 옮기는 동안, 우리 규정과 어긋나 있던 곳 셋을 찾아 바로잡았습니다.</a:t>
             </a:r>
             <a:endParaRPr lang="en-US" sz="1500" dirty="0"/>
           </a:p>
@@ -25448,7 +25448,7 @@
                 <a:ea typeface="맑은 고딕" pitchFamily="34" charset="-122"/>
                 <a:cs typeface="맑은 고딕" pitchFamily="34" charset="-120"/>
               </a:rPr>
-              <a:t>인터넷 창만 열면 되는 시험 시스템입니다</a:t>
+              <a:t>따로 깔 것이 없습니다. 인터넷 창만 열면 바로 시험장이 됩니다</a:t>
             </a:r>
             <a:endParaRPr lang="en-US" sz="1900" dirty="0"/>
           </a:p>
@@ -25574,7 +25574,7 @@
                 <a:ea typeface="맑은 고딕" pitchFamily="34" charset="-122"/>
                 <a:cs typeface="맑은 고딕" pitchFamily="34" charset="-120"/>
               </a:rPr>
-              <a:t>주소만 알면 어느 컴퓨터에서든 열린다</a:t>
+              <a:t>주소만 알면 어느 컴퓨터에서든 열립니다</a:t>
             </a:r>
             <a:endParaRPr lang="en-US" sz="1450" dirty="0"/>
           </a:p>
@@ -25655,7 +25655,7 @@
                 <a:ea typeface="맑은 고딕" pitchFamily="34" charset="-122"/>
                 <a:cs typeface="맑은 고딕" pitchFamily="34" charset="-120"/>
               </a:rPr>
-              <a:t>이름·등급·종목을 고르면 바로 시작</a:t>
+              <a:t>이름을 넣고 종목만 고르면 바로 시작합니다</a:t>
             </a:r>
             <a:endParaRPr lang="en-US" sz="1450" dirty="0"/>
           </a:p>
@@ -25736,7 +25736,7 @@
                 <a:ea typeface="맑은 고딕" pitchFamily="34" charset="-122"/>
                 <a:cs typeface="맑은 고딕" pitchFamily="34" charset="-120"/>
               </a:rPr>
-              <a:t>현장이나 출장지에서 노트북으로 칠 수 있다</a:t>
+              <a:t>현장이든 출장지든 노트북만 있으면 됩니다</a:t>
             </a:r>
             <a:endParaRPr lang="en-US" sz="1450" dirty="0"/>
           </a:p>
@@ -25817,7 +25817,7 @@
                 <a:ea typeface="맑은 고딕" pitchFamily="34" charset="-122"/>
                 <a:cs typeface="맑은 고딕" pitchFamily="34" charset="-120"/>
               </a:rPr>
-              <a:t>컴퓨터가 모자라면 시험지를 뽑아 쓴다</a:t>
+              <a:t>컴퓨터가 모자라면 시험지를 뽑아 종이로 칩니다</a:t>
             </a:r>
             <a:endParaRPr lang="en-US" sz="1450" dirty="0"/>
           </a:p>
@@ -25998,7 +25998,7 @@
                 <a:ea typeface="맑은 고딕" pitchFamily="34" charset="-122"/>
                 <a:cs typeface="맑은 고딕" pitchFamily="34" charset="-120"/>
               </a:rPr>
-              <a:t>영문 원문과 우리말을 함께 보여줍니다</a:t>
+              <a:t>원본이 영문이라 그대로 두고, 그 아래에 우리말을 나란히 붙였습니다</a:t>
             </a:r>
             <a:endParaRPr lang="en-US" sz="1900" dirty="0"/>
           </a:p>
@@ -26183,7 +26183,7 @@
                 <a:ea typeface="맑은 고딕" pitchFamily="34" charset="-122"/>
                 <a:cs typeface="맑은 고딕" pitchFamily="34" charset="-120"/>
               </a:rPr>
-              <a:t>규정이 정한 40문항만 나온다. 문제은행에</a:t>
+              <a:t>규정이 정한 만큼만 나옵니다. 은행에 60문항이</a:t>
             </a:r>
             <a:endParaRPr lang="en-US" sz="1150" dirty="0"/>
           </a:p>
@@ -26203,7 +26203,7 @@
                 <a:ea typeface="맑은 고딕" pitchFamily="34" charset="-122"/>
                 <a:cs typeface="맑은 고딕" pitchFamily="34" charset="-120"/>
               </a:rPr>
-              <a:t>60문항이 들어 있어도 그중에서 40개만 뽑는다.</a:t>
+              <a:t>들어 있어도 그중에서 40개를 뽑습니다.</a:t>
             </a:r>
             <a:endParaRPr lang="en-US" sz="1150" dirty="0"/>
           </a:p>
@@ -26343,7 +26343,7 @@
                 <a:ea typeface="맑은 고딕" pitchFamily="34" charset="-122"/>
                 <a:cs typeface="맑은 고딕" pitchFamily="34" charset="-120"/>
               </a:rPr>
-              <a:t>원본 시험지가 영문이라 그대로 두고 아래에</a:t>
+              <a:t>영문만 놓으면 읽다가 막히고, 우리말만 놓으면</a:t>
             </a:r>
             <a:endParaRPr lang="en-US" sz="1150" dirty="0"/>
           </a:p>
@@ -26363,7 +26363,7 @@
                 <a:ea typeface="맑은 고딕" pitchFamily="34" charset="-122"/>
                 <a:cs typeface="맑은 고딕" pitchFamily="34" charset="-120"/>
               </a:rPr>
-              <a:t>우리말을 붙였다. 보기도 두 줄로 같이 보여준다.</a:t>
+              <a:t>원문과 달라집니다. 그래서 둘 다 보여 줍니다.</a:t>
             </a:r>
             <a:endParaRPr lang="en-US" sz="1150" dirty="0"/>
           </a:p>
@@ -26503,7 +26503,7 @@
                 <a:ea typeface="맑은 고딕" pitchFamily="34" charset="-122"/>
                 <a:cs typeface="맑은 고딕" pitchFamily="34" charset="-120"/>
               </a:rPr>
-              <a:t>보기 차례를 시험마다 섞는다. 다만 「위 모두</a:t>
+              <a:t>보기 차례도 시험마다 섞습니다. 다만 「위 모두</a:t>
             </a:r>
             <a:endParaRPr lang="en-US" sz="1150" dirty="0"/>
           </a:p>
@@ -26523,7 +26523,7 @@
                 <a:ea typeface="맑은 고딕" pitchFamily="34" charset="-122"/>
                 <a:cs typeface="맑은 고딕" pitchFamily="34" charset="-120"/>
               </a:rPr>
-              <a:t>정답」 같은 것은 자리를 옮기면 말이 안 되므로 묶어 둔다.</a:t>
+              <a:t>정답」처럼 자리를 옮기면 말이 안 되는 것은 붙들어 둡니다.</a:t>
             </a:r>
             <a:endParaRPr lang="en-US" sz="1150" dirty="0"/>
           </a:p>
@@ -26663,7 +26663,7 @@
                 <a:ea typeface="맑은 고딕" pitchFamily="34" charset="-122"/>
                 <a:cs typeface="맑은 고딕" pitchFamily="34" charset="-120"/>
               </a:rPr>
-              <a:t>지금까지 고른 답이 오른쪽에 쭉 보인다.</a:t>
+              <a:t>고른 답이 오른쪽에 쭉 보입니다. 번호를 누르면</a:t>
             </a:r>
             <a:endParaRPr lang="en-US" sz="1150" dirty="0"/>
           </a:p>
@@ -26683,7 +26683,7 @@
                 <a:ea typeface="맑은 고딕" pitchFamily="34" charset="-122"/>
                 <a:cs typeface="맑은 고딕" pitchFamily="34" charset="-120"/>
               </a:rPr>
-              <a:t>번호를 눌러 그 문항으로 바로 건너뛴다.</a:t>
+              <a:t>그 문항으로 바로 건너뜁니다.</a:t>
             </a:r>
             <a:endParaRPr lang="en-US" sz="1150" dirty="0"/>
           </a:p>
@@ -26823,7 +26823,7 @@
                 <a:ea typeface="맑은 고딕" pitchFamily="34" charset="-122"/>
                 <a:cs typeface="맑은 고딕" pitchFamily="34" charset="-120"/>
               </a:rPr>
-              <a:t>계산기는 화면 안에서 열고 닫는다.</a:t>
+              <a:t>계산기는 화면 안에서 열고 닫습니다. 종료를 누르면</a:t>
             </a:r>
             <a:endParaRPr lang="en-US" sz="1150" dirty="0"/>
           </a:p>
@@ -26843,7 +26843,7 @@
                 <a:ea typeface="맑은 고딕" pitchFamily="34" charset="-122"/>
                 <a:cs typeface="맑은 고딕" pitchFamily="34" charset="-120"/>
               </a:rPr>
-              <a:t>종료를 누르면 입력한 답이 사라진다고 먼저 알린다.</a:t>
+              <a:t>답이 사라진다고 먼저 물어봅니다.</a:t>
             </a:r>
             <a:endParaRPr lang="en-US" sz="1150" dirty="0"/>
           </a:p>
@@ -27184,7 +27184,7 @@
                 <a:ea typeface="맑은 고딕" pitchFamily="34" charset="-122"/>
                 <a:cs typeface="맑은 고딕" pitchFamily="34" charset="-120"/>
               </a:rPr>
-              <a:t>전문시험은 장비와 검사 절차를 묻습니다. 그래서 회사 검사절차서를 보며 풀 수 있게 했습니다</a:t>
+              <a:t>전문시험은 우리 장비와 절차를 묻습니다. 그래서 절차서를 옆에 펴 놓고 풀 수 있게 했습니다</a:t>
             </a:r>
             <a:endParaRPr lang="en-US" sz="1900" dirty="0"/>
           </a:p>
@@ -27472,7 +27472,7 @@
                 <a:ea typeface="맑은 고딕" pitchFamily="34" charset="-122"/>
                 <a:cs typeface="맑은 고딕" pitchFamily="34" charset="-120"/>
               </a:rPr>
-              <a:t>절차서 안에서 낱말을 넣으면 그 자리로 간다</a:t>
+              <a:t>낱말을 넣으면 그 자리로 바로 갑니다</a:t>
             </a:r>
             <a:endParaRPr lang="en-US" sz="1300" dirty="0"/>
           </a:p>
@@ -27553,7 +27553,7 @@
                 <a:ea typeface="맑은 고딕" pitchFamily="34" charset="-122"/>
                 <a:cs typeface="맑은 고딕" pitchFamily="34" charset="-120"/>
               </a:rPr>
-              <a:t>문제에 적힌 절차서 이름을 누르면 열린다</a:t>
+              <a:t>문제에 적힌 절차서 이름을 누르면 열립니다</a:t>
             </a:r>
             <a:endParaRPr lang="en-US" sz="1300" dirty="0"/>
           </a:p>
@@ -27617,7 +27617,7 @@
                 <a:ea typeface="맑은 고딕" pitchFamily="34" charset="-122"/>
                 <a:cs typeface="맑은 고딕" pitchFamily="34" charset="-120"/>
               </a:rPr>
-              <a:t>사무실로 찾으러 가지 않는다</a:t>
+              <a:t>사무실로 찾으러 가지 않아도 됩니다</a:t>
             </a:r>
             <a:endParaRPr lang="en-US" sz="1350" dirty="0"/>
           </a:p>
@@ -27656,7 +27656,7 @@
                 <a:ea typeface="맑은 고딕" pitchFamily="34" charset="-122"/>
                 <a:cs typeface="맑은 고딕" pitchFamily="34" charset="-120"/>
               </a:rPr>
-              <a:t>표지 양식이 문서마다 제각각이던 것을 하나로 맞추고, 기계 번역투 58군데를 다시 썼습니다.</a:t>
+              <a:t>표지 양식이 제각각이라 하나로 맞추고, 어색한 번역 문장 58군데를 다시 썼습니다.</a:t>
             </a:r>
             <a:endParaRPr lang="en-US" sz="1300" dirty="0"/>
           </a:p>
@@ -27798,7 +27798,7 @@
                 <a:ea typeface="맑은 고딕" pitchFamily="34" charset="-122"/>
                 <a:cs typeface="맑은 고딕" pitchFamily="34" charset="-120"/>
               </a:rPr>
-              <a:t>제출과 동시에 점수가 나옵니다</a:t>
+              <a:t>마지막 문항을 풀고 제출을 누르면, 그 자리에서 점수가 나옵니다</a:t>
             </a:r>
             <a:endParaRPr lang="en-US" sz="1900" dirty="0"/>
           </a:p>
@@ -27882,7 +27882,7 @@
                 <a:ea typeface="맑은 고딕" pitchFamily="34" charset="-122"/>
                 <a:cs typeface="맑은 고딕" pitchFamily="34" charset="-120"/>
               </a:rPr>
-              <a:t>사람이 채점하지 않는다</a:t>
+              <a:t>사람이 채점하지 않습니다</a:t>
             </a:r>
             <a:endParaRPr lang="en-US" sz="1900" dirty="0"/>
           </a:p>
@@ -27924,7 +27924,7 @@
                 <a:ea typeface="맑은 고딕" pitchFamily="34" charset="-122"/>
                 <a:cs typeface="맑은 고딕" pitchFamily="34" charset="-120"/>
               </a:rPr>
-              <a:t>정답지 대조도, 점수 계산도 없다.</a:t>
+              <a:t>정답지를 맞춰 볼 일도, 점수를 셀 일도 없습니다.</a:t>
             </a:r>
             <a:endParaRPr lang="en-US" sz="1400" dirty="0"/>
           </a:p>
@@ -27944,7 +27944,7 @@
                 <a:ea typeface="맑은 고딕" pitchFamily="34" charset="-122"/>
                 <a:cs typeface="맑은 고딕" pitchFamily="34" charset="-120"/>
               </a:rPr>
-              <a:t>같은 시험은 언제 채점해도 같은 점수다.</a:t>
+              <a:t>같은 시험은 언제 채점해도 같은 점수가 나옵니다.</a:t>
             </a:r>
             <a:endParaRPr lang="en-US" sz="1400" dirty="0"/>
           </a:p>
@@ -27983,7 +27983,7 @@
                 <a:ea typeface="맑은 고딕" pitchFamily="34" charset="-122"/>
                 <a:cs typeface="맑은 고딕" pitchFamily="34" charset="-120"/>
               </a:rPr>
-              <a:t>종합점수를 자동으로</a:t>
+              <a:t>평균도 저절로</a:t>
             </a:r>
             <a:endParaRPr lang="en-US" sz="1900" dirty="0"/>
           </a:p>
@@ -28025,7 +28025,7 @@
                 <a:ea typeface="맑은 고딕" pitchFamily="34" charset="-122"/>
                 <a:cs typeface="맑은 고딕" pitchFamily="34" charset="-120"/>
               </a:rPr>
-              <a:t>요구되는 시험의 단순 평균.</a:t>
+              <a:t>과목마다 70%를 넘겨야 하고, 평균은 80%를 넘겨야</a:t>
             </a:r>
             <a:endParaRPr lang="en-US" sz="1400" dirty="0"/>
           </a:p>
@@ -28045,7 +28045,7 @@
                 <a:ea typeface="맑은 고딕" pitchFamily="34" charset="-122"/>
                 <a:cs typeface="맑은 고딕" pitchFamily="34" charset="-120"/>
               </a:rPr>
-              <a:t>개별 70% · 종합 80% (E01 7.4.4·7.4.5)</a:t>
+              <a:t>합니다. 우리 절차서가 정해 둔 그대로입니다.</a:t>
             </a:r>
             <a:endParaRPr lang="en-US" sz="1400" dirty="0"/>
           </a:p>
@@ -28084,7 +28084,7 @@
                 <a:ea typeface="맑은 고딕" pitchFamily="34" charset="-122"/>
                 <a:cs typeface="맑은 고딕" pitchFamily="34" charset="-120"/>
               </a:rPr>
-              <a:t>틀린 문항과 근거를 함께</a:t>
+              <a:t>틀린 문항은 근거와 함께</a:t>
             </a:r>
             <a:endParaRPr lang="en-US" sz="1900" dirty="0"/>
           </a:p>
@@ -28126,7 +28126,7 @@
                 <a:ea typeface="맑은 고딕" pitchFamily="34" charset="-122"/>
                 <a:cs typeface="맑은 고딕" pitchFamily="34" charset="-120"/>
               </a:rPr>
-              <a:t>시험이 그대로 교육이 된다.</a:t>
+              <a:t>왜 틀렸는지 그 자리에서 알게 됩니다. 시험이 그대로 공부가 됩니다.</a:t>
             </a:r>
             <a:endParaRPr lang="en-US" sz="1400" dirty="0"/>
           </a:p>
@@ -28268,7 +28268,7 @@
                 <a:ea typeface="맑은 고딕" pitchFamily="34" charset="-122"/>
                 <a:cs typeface="맑은 고딕" pitchFamily="34" charset="-120"/>
               </a:rPr>
-              <a:t>누가 언제 무슨 시험을 쳐서 몇 점을 받았는지 한자리에서 봅니다</a:t>
+              <a:t>누가 언제 무슨 시험을 쳐서 몇 점을 받았는지, 한 화면에서 다 보입니다</a:t>
             </a:r>
             <a:endParaRPr lang="en-US" sz="1900" dirty="0"/>
           </a:p>
@@ -28593,7 +28593,7 @@
                 <a:ea typeface="맑은 고딕" pitchFamily="34" charset="-122"/>
                 <a:cs typeface="맑은 고딕" pitchFamily="34" charset="-120"/>
               </a:rPr>
-              <a:t>시험시간을 지켰는지 나중에 확인할 수 있다</a:t>
+              <a:t>시험시간을 지켰는지 나중에 짚어 볼 수 있습니다</a:t>
             </a:r>
             <a:endParaRPr lang="en-US" sz="1150" dirty="0"/>
           </a:p>
@@ -28733,7 +28733,7 @@
                 <a:ea typeface="맑은 고딕" pitchFamily="34" charset="-122"/>
                 <a:cs typeface="맑은 고딕" pitchFamily="34" charset="-120"/>
               </a:rPr>
-              <a:t>16 / 27 처럼 몇 문항 중 몇 개인지 함께</a:t>
+              <a:t>몇 문항 중 몇 개를 맞혔는지 함께 적힙니다</a:t>
             </a:r>
             <a:endParaRPr lang="en-US" sz="1150" dirty="0"/>
           </a:p>
@@ -28873,7 +28873,7 @@
                 <a:ea typeface="맑은 고딕" pitchFamily="34" charset="-122"/>
                 <a:cs typeface="맑은 고딕" pitchFamily="34" charset="-120"/>
               </a:rPr>
-              <a:t>합격 · 불합격을 색으로 가른다</a:t>
+              <a:t>합격과 불합격은 색으로 갈라 둡니다</a:t>
             </a:r>
             <a:endParaRPr lang="en-US" sz="1150" dirty="0"/>
           </a:p>
@@ -29013,7 +29013,7 @@
                 <a:ea typeface="맑은 고딕" pitchFamily="34" charset="-122"/>
                 <a:cs typeface="맑은 고딕" pitchFamily="34" charset="-120"/>
               </a:rPr>
-              <a:t>그 회차의 채점결과보고서(E02-07)를 뽑는다</a:t>
+              <a:t>그 회차의 채점결과보고서를 그 자리에서 뽑습니다</a:t>
             </a:r>
             <a:endParaRPr lang="en-US" sz="1150" dirty="0"/>
           </a:p>
@@ -29153,7 +29153,7 @@
                 <a:ea typeface="맑은 고딕" pitchFamily="34" charset="-122"/>
                 <a:cs typeface="맑은 고딕" pitchFamily="34" charset="-120"/>
               </a:rPr>
-              <a:t>사람 단위로 묶어 보는 화면으로 넘어간다</a:t>
+              <a:t>사람별로 묶어 보는 화면으로 넘어갑니다</a:t>
             </a:r>
             <a:endParaRPr lang="en-US" sz="1150" dirty="0"/>
           </a:p>
@@ -29192,7 +29192,7 @@
                 <a:ea typeface="맑은 고딕" pitchFamily="34" charset="-122"/>
                 <a:cs typeface="맑은 고딕" pitchFamily="34" charset="-120"/>
               </a:rPr>
-              <a:t>이름으로 찾거나 등급·검사법으로 거를 수 있습니다. 응시 기록은 구글 시트에 쌓이므로 어느 컴퓨터에서 봐도 같습니다.</a:t>
+              <a:t>이름으로 찾을 수도, 등급이나 검사법으로 걸러 볼 수도 있습니다. 기록은 한곳에 쌓이므로 어느 컴퓨터에서 봐도 같습니다.</a:t>
             </a:r>
             <a:endParaRPr lang="en-US" sz="1350" dirty="0"/>
           </a:p>
@@ -29334,7 +29334,7 @@
                 <a:ea typeface="맑은 고딕" pitchFamily="34" charset="-122"/>
                 <a:cs typeface="맑은 고딕" pitchFamily="34" charset="-120"/>
               </a:rPr>
-              <a:t>사람 한 명이 친 시험을 전부 묶어, 자격이 지금 어떤지 판정합니다</a:t>
+              <a:t>한 사람이 지금까지 친 시험을 전부 모아, 자격이 지금 어떤 상태인지 알려 줍니다</a:t>
             </a:r>
             <a:endParaRPr lang="en-US" sz="1900" dirty="0"/>
           </a:p>
@@ -29519,7 +29519,7 @@
                 <a:ea typeface="맑은 고딕" pitchFamily="34" charset="-122"/>
                 <a:cs typeface="맑은 고딕" pitchFamily="34" charset="-120"/>
               </a:rPr>
-              <a:t>그 사람이 친 시험을 등급·종목별로 모은다</a:t>
+              <a:t>그 사람이 친 시험을 등급과 종목별로 모읍니다</a:t>
             </a:r>
             <a:endParaRPr lang="en-US" sz="1150" dirty="0"/>
           </a:p>
@@ -29659,7 +29659,7 @@
                 <a:ea typeface="맑은 고딕" pitchFamily="34" charset="-122"/>
                 <a:cs typeface="맑은 고딕" pitchFamily="34" charset="-120"/>
               </a:rPr>
-              <a:t>요구되는 시험의 평균 — 규정이 정한 방식 그대로</a:t>
+              <a:t>규정이 정한 대로 평균을 냅니다</a:t>
             </a:r>
             <a:endParaRPr lang="en-US" sz="1150" dirty="0"/>
           </a:p>
@@ -29799,7 +29799,7 @@
                 <a:ea typeface="맑은 고딕" pitchFamily="34" charset="-122"/>
                 <a:cs typeface="맑은 고딕" pitchFamily="34" charset="-120"/>
               </a:rPr>
-              <a:t>합격 · 불합격 · 미완을 가른다</a:t>
+              <a:t>합격인지, 불합격인지, 아직 덜 끝났는지를 가려 줍니다</a:t>
             </a:r>
             <a:endParaRPr lang="en-US" sz="1150" dirty="0"/>
           </a:p>
@@ -29939,7 +29939,7 @@
                 <a:ea typeface="맑은 고딕" pitchFamily="34" charset="-122"/>
                 <a:cs typeface="맑은 고딕" pitchFamily="34" charset="-120"/>
               </a:rPr>
-              <a:t>언제까지 유효한지</a:t>
+              <a:t>언제까지 쓸 수 있는 자격인지</a:t>
             </a:r>
             <a:endParaRPr lang="en-US" sz="1150" dirty="0"/>
           </a:p>
@@ -30079,7 +30079,7 @@
                 <a:ea typeface="맑은 고딕" pitchFamily="34" charset="-122"/>
                 <a:cs typeface="맑은 고딕" pitchFamily="34" charset="-120"/>
               </a:rPr>
-              <a:t>유효 · 만료 임박 · 만료를 색으로</a:t>
+              <a:t>살아 있는지, 곧 끝나는지, 이미 끝났는지를 색으로</a:t>
             </a:r>
             <a:endParaRPr lang="en-US" sz="1150" dirty="0"/>
           </a:p>
@@ -30118,7 +30118,7 @@
                 <a:ea typeface="맑은 고딕" pitchFamily="34" charset="-122"/>
                 <a:cs typeface="맑은 고딕" pitchFamily="34" charset="-120"/>
               </a:rPr>
-              <a:t>여섯 사람이 각각 다른 경우입니다. 한 줄씩 보겠습니다.</a:t>
+              <a:t>여섯 사람이 저마다 다른 경우입니다. 한 사람씩 따라가 보겠습니다.</a:t>
             </a:r>
             <a:endParaRPr lang="en-US" sz="1500" dirty="0"/>
           </a:p>

--- a/docs/발표자료-CBT-2026-08.pptx
+++ b/docs/발표자료-CBT-2026-08.pptx
@@ -14189,7 +14189,7 @@
                 <a:ea typeface="맑은 고딕" pitchFamily="34" charset="-122"/>
                 <a:cs typeface="맑은 고딕" pitchFamily="34" charset="-120"/>
               </a:rPr>
-              <a:t>규정 조항</a:t>
+              <a:t>규정</a:t>
             </a:r>
             <a:endParaRPr lang="en-US" sz="1300" dirty="0"/>
           </a:p>
@@ -14253,7 +14253,7 @@
                 <a:ea typeface="맑은 고딕" pitchFamily="34" charset="-122"/>
                 <a:cs typeface="맑은 고딕" pitchFamily="34" charset="-120"/>
               </a:rPr>
-              <a:t>무엇을 정하나</a:t>
+              <a:t>정해 둔 것</a:t>
             </a:r>
             <a:endParaRPr lang="en-US" sz="1300" dirty="0"/>
           </a:p>
@@ -14317,7 +14317,7 @@
                 <a:ea typeface="맑은 고딕" pitchFamily="34" charset="-122"/>
                 <a:cs typeface="맑은 고딕" pitchFamily="34" charset="-120"/>
               </a:rPr>
-              <a:t>어느 파일</a:t>
+              <a:t>들어간 파일</a:t>
             </a:r>
             <a:endParaRPr lang="en-US" sz="1300" dirty="0"/>
           </a:p>
@@ -14381,7 +14381,7 @@
                 <a:ea typeface="맑은 고딕" pitchFamily="34" charset="-122"/>
                 <a:cs typeface="맑은 고딕" pitchFamily="34" charset="-120"/>
               </a:rPr>
-              <a:t>어느 값</a:t>
+              <a:t>붙여 둔 이름</a:t>
             </a:r>
             <a:endParaRPr lang="en-US" sz="1300" dirty="0"/>
           </a:p>
@@ -30679,7 +30679,7 @@
                 <a:ea typeface="맑은 고딕" pitchFamily="34" charset="-122"/>
                 <a:cs typeface="맑은 고딕" pitchFamily="34" charset="-120"/>
               </a:rPr>
-              <a:t>어느 시험을 쳤는지</a:t>
+              <a:t>누가 무슨 시험을 쳤는지</a:t>
             </a:r>
             <a:endParaRPr lang="en-US" sz="1150" dirty="0"/>
           </a:p>

--- a/docs/발표자료-CBT-2026-08.pptx
+++ b/docs/발표자료-CBT-2026-08.pptx
@@ -3848,7 +3848,7 @@
                 <a:ea typeface="맑은 고딕" pitchFamily="34" charset="-122"/>
                 <a:cs typeface="맑은 고딕" pitchFamily="34" charset="-120"/>
               </a:rPr>
-              <a:t>자격 이력 ②  점수를 어떻게 판정하나</a:t>
+              <a:t>자격 이력 ②  점수를 이렇게 가른다</a:t>
             </a:r>
             <a:endParaRPr lang="en-US" sz="3400" dirty="0"/>
           </a:p>
@@ -5030,7 +5030,7 @@
                 <a:ea typeface="맑은 고딕" pitchFamily="34" charset="-122"/>
                 <a:cs typeface="맑은 고딕" pitchFamily="34" charset="-120"/>
               </a:rPr>
-              <a:t>자격 이력 ④  바깥 자격이 있으면</a:t>
+              <a:t>자격 이력 ④  바깥 자격이 있으면 면제된다</a:t>
             </a:r>
             <a:endParaRPr lang="en-US" sz="3400" dirty="0"/>
           </a:p>
@@ -5992,7 +5992,7 @@
                 <a:ea typeface="맑은 고딕" pitchFamily="34" charset="-122"/>
                 <a:cs typeface="맑은 고딕" pitchFamily="34" charset="-120"/>
               </a:rPr>
-              <a:t>관리자 화면 ③  서식이 저절로</a:t>
+              <a:t>관리자 화면 ③  서식이 저절로 쌓인다</a:t>
             </a:r>
             <a:endParaRPr lang="en-US" sz="3400" dirty="0"/>
           </a:p>
@@ -8907,7 +8907,7 @@
                 <a:ea typeface="맑은 고딕" pitchFamily="34" charset="-122"/>
                 <a:cs typeface="맑은 고딕" pitchFamily="34" charset="-120"/>
               </a:rPr>
-              <a:t>만든 방법 ①-2  화면은 이렇게 생겼습니다</a:t>
+              <a:t>만든 방법 ①-2  화면은 이렇게 생겼다</a:t>
             </a:r>
             <a:endParaRPr lang="en-US" sz="3400" dirty="0"/>
           </a:p>
@@ -9637,7 +9637,7 @@
                 <a:ea typeface="맑은 고딕" pitchFamily="34" charset="-122"/>
                 <a:cs typeface="맑은 고딕" pitchFamily="34" charset="-120"/>
               </a:rPr>
-              <a:t>만든 방법 ①-3  고치고 · 보고 · 되돌리고</a:t>
+              <a:t>만든 방법 ①-3  고치고 · 보고 · 되돌린다</a:t>
             </a:r>
             <a:endParaRPr lang="en-US" sz="3400" dirty="0"/>
           </a:p>
@@ -10324,7 +10324,7 @@
                 <a:ea typeface="맑은 고딕" pitchFamily="34" charset="-122"/>
                 <a:cs typeface="맑은 고딕" pitchFamily="34" charset="-120"/>
               </a:rPr>
-              <a:t>어긋난 데가 없는지</a:t>
+              <a:t>어긋난 데가 없는지 본다</a:t>
             </a:r>
             <a:endParaRPr lang="en-US" sz="1200" dirty="0"/>
           </a:p>
@@ -10567,7 +10567,7 @@
                 <a:ea typeface="맑은 고딕" pitchFamily="34" charset="-122"/>
                 <a:cs typeface="맑은 고딕" pitchFamily="34" charset="-120"/>
               </a:rPr>
-              <a:t>왜 고쳤는지 적어서</a:t>
+              <a:t>왜 고쳤는지 적어 둔다</a:t>
             </a:r>
             <a:endParaRPr lang="en-US" sz="1200" dirty="0"/>
           </a:p>
@@ -10906,7 +10906,7 @@
                 <a:ea typeface="맑은 고딕" pitchFamily="34" charset="-122"/>
                 <a:cs typeface="맑은 고딕" pitchFamily="34" charset="-120"/>
               </a:rPr>
-              <a:t>예전에는 이랬습니다</a:t>
+              <a:t>예전에는 이랬다</a:t>
             </a:r>
             <a:endParaRPr lang="en-US" sz="3400" dirty="0"/>
           </a:p>
@@ -11934,7 +11934,7 @@
                 <a:ea typeface="맑은 고딕" pitchFamily="34" charset="-122"/>
                 <a:cs typeface="맑은 고딕" pitchFamily="34" charset="-120"/>
               </a:rPr>
-              <a:t>만든 방법 ①-4  기록이 남아 있습니다</a:t>
+              <a:t>만든 방법 ①-4  기록이 남아 있다</a:t>
             </a:r>
             <a:endParaRPr lang="en-US" sz="3400" dirty="0"/>
           </a:p>
@@ -13089,7 +13089,7 @@
                 <a:ea typeface="맑은 고딕" pitchFamily="34" charset="-122"/>
                 <a:cs typeface="맑은 고딕" pitchFamily="34" charset="-120"/>
               </a:rPr>
-              <a:t>만든 방법 ①-5  한 벌을 옮기는 데</a:t>
+              <a:t>만든 방법 ①-5  한 벌을 옮긴다는 것</a:t>
             </a:r>
             <a:endParaRPr lang="en-US" sz="3400" dirty="0"/>
           </a:p>
@@ -15832,7 +15832,7 @@
                 <a:ea typeface="맑은 고딕" pitchFamily="34" charset="-122"/>
                 <a:cs typeface="맑은 고딕" pitchFamily="34" charset="-120"/>
               </a:rPr>
-              <a:t>만료 3개월 전에 알린다</a:t>
+              <a:t>만료 3개월 전에 알림</a:t>
             </a:r>
             <a:endParaRPr lang="en-US" sz="1300" dirty="0"/>
           </a:p>
@@ -15988,7 +15988,7 @@
                 <a:ea typeface="맑은 고딕" pitchFamily="34" charset="-122"/>
                 <a:cs typeface="맑은 고딕" pitchFamily="34" charset="-120"/>
               </a:rPr>
-              <a:t>보기 차례를 시험마다 섞는다</a:t>
+              <a:t>보기 차례를 시험마다 섞기</a:t>
             </a:r>
             <a:endParaRPr lang="en-US" sz="1300" dirty="0"/>
           </a:p>
@@ -16545,7 +16545,7 @@
                 <a:ea typeface="맑은 고딕" pitchFamily="34" charset="-122"/>
                 <a:cs typeface="맑은 고딕" pitchFamily="34" charset="-120"/>
               </a:rPr>
-              <a:t>만든 방법 ③  어떤 차례로</a:t>
+              <a:t>만든 방법 ③  화면보다 규정을 먼저</a:t>
             </a:r>
             <a:endParaRPr lang="en-US" sz="3400" dirty="0"/>
           </a:p>
@@ -22208,7 +22208,7 @@
                 <a:ea typeface="맑은 고딕" pitchFamily="34" charset="-122"/>
                 <a:cs typeface="맑은 고딕" pitchFamily="34" charset="-120"/>
               </a:rPr>
-              <a:t>만든 방법 ⑧  어떻게 굴러가나</a:t>
+              <a:t>만든 방법 ⑧  고친 것이 응시자에게 닿기까지</a:t>
             </a:r>
             <a:endParaRPr lang="en-US" sz="3400" dirty="0"/>
           </a:p>
@@ -24568,7 +24568,7 @@
                 <a:ea typeface="맑은 고딕" pitchFamily="34" charset="-122"/>
                 <a:cs typeface="맑은 고딕" pitchFamily="34" charset="-120"/>
               </a:rPr>
-              <a:t>그래서 이걸 만들었습니다</a:t>
+              <a:t>그래서 이걸 만들었다</a:t>
             </a:r>
             <a:endParaRPr lang="en-US" sz="3400" dirty="0"/>
           </a:p>

--- a/docs/발표자료-CBT-2026-08.pptx
+++ b/docs/발표자료-CBT-2026-08.pptx
@@ -1062,7 +1062,7 @@
           <a:p>
             <a:r>
               <a:rPr lang="en-US" dirty="0"/>
-              <a:t>서식은 사람이 손으로 채우는 것이지만, 양식을 찾아 헤맬 일은 없앴습니다.</a:t>
+              <a:t>서식은 사람이 손으로 채우는 것이지만, 양식을 찾아 헤맬 일은 없앴습니다. 면제 칸의 근거는 E01 7.3.5 와 7.3.7 입니다.</a:t>
             </a:r>
             <a:endParaRPr lang="en-US" dirty="0"/>
           </a:p>
@@ -6918,24 +6918,24 @@
         </p:nvSpPr>
         <p:spPr>
           <a:xfrm>
-            <a:off x="566928" y="5394960"/>
-            <a:ext cx="2926080" cy="548640"/>
-          </a:xfrm>
-          <a:prstGeom prst="rect">
-            <a:avLst/>
-          </a:prstGeom>
-          <a:noFill/>
-          <a:ln/>
-        </p:spPr>
-        <p:txBody>
-          <a:bodyPr wrap="square" lIns="0" tIns="0" rIns="0" bIns="0" rtlCol="0" anchor="ctr"/>
-          <a:lstStyle/>
-          <a:p>
-            <a:pPr indent="0" marL="0">
-              <a:buNone/>
-            </a:pPr>
-            <a:r>
-              <a:rPr lang="en-US" sz="4000" b="1" dirty="0">
+            <a:off x="566928" y="5358384"/>
+            <a:ext cx="2926080" cy="585216"/>
+          </a:xfrm>
+          <a:prstGeom prst="rect">
+            <a:avLst/>
+          </a:prstGeom>
+          <a:noFill/>
+          <a:ln/>
+        </p:spPr>
+        <p:txBody>
+          <a:bodyPr wrap="square" lIns="0" tIns="0" rIns="0" bIns="0" rtlCol="0" anchor="ctr"/>
+          <a:lstStyle/>
+          <a:p>
+            <a:pPr indent="0" marL="0">
+              <a:buNone/>
+            </a:pPr>
+            <a:r>
+              <a:rPr lang="en-US" sz="3400" b="1" dirty="0">
                 <a:solidFill>
                   <a:srgbClr val="FF0000"/>
                 </a:solidFill>
@@ -6945,7 +6945,7 @@
               </a:rPr>
               <a:t>9종</a:t>
             </a:r>
-            <a:endParaRPr lang="en-US" sz="4000" dirty="0"/>
+            <a:endParaRPr lang="en-US" sz="3400" dirty="0"/>
           </a:p>
         </p:txBody>
       </p:sp>
@@ -7047,7 +7047,7 @@
                 <a:ea typeface="맑은 고딕" pitchFamily="34" charset="-122"/>
                 <a:cs typeface="맑은 고딕" pitchFamily="34" charset="-120"/>
               </a:rPr>
-              <a:t>바깥 기관 자격으로 면제받는 사람을 적는 칸을</a:t>
+              <a:t>면제받는 사람을 적는 칸을</a:t>
             </a:r>
             <a:endParaRPr lang="en-US" sz="1300" dirty="0"/>
           </a:p>
@@ -7067,7 +7067,7 @@
                 <a:ea typeface="맑은 고딕" pitchFamily="34" charset="-122"/>
                 <a:cs typeface="맑은 고딕" pitchFamily="34" charset="-120"/>
               </a:rPr>
-              <a:t>E02-01 에 새로 냈습니다 (E01 7.3.5 · 7.3.7)</a:t>
+              <a:t>E02-01 에 새로 냈습니다</a:t>
             </a:r>
             <a:endParaRPr lang="en-US" sz="1300" dirty="0"/>
           </a:p>
@@ -28230,23 +28230,23 @@
         <p:spPr>
           <a:xfrm>
             <a:off x="8065008" y="4956048"/>
-            <a:ext cx="3749040" cy="548640"/>
-          </a:xfrm>
-          <a:prstGeom prst="rect">
-            <a:avLst/>
-          </a:prstGeom>
-          <a:noFill/>
-          <a:ln/>
-        </p:spPr>
-        <p:txBody>
-          <a:bodyPr wrap="square" lIns="0" tIns="0" rIns="0" bIns="0" rtlCol="0" anchor="ctr"/>
-          <a:lstStyle/>
-          <a:p>
-            <a:pPr indent="0" marL="0">
-              <a:buNone/>
-            </a:pPr>
-            <a:r>
-              <a:rPr lang="en-US" sz="3600" b="1" dirty="0">
+            <a:ext cx="3749040" cy="512064"/>
+          </a:xfrm>
+          <a:prstGeom prst="rect">
+            <a:avLst/>
+          </a:prstGeom>
+          <a:noFill/>
+          <a:ln/>
+        </p:spPr>
+        <p:txBody>
+          <a:bodyPr wrap="square" lIns="0" tIns="0" rIns="0" bIns="0" rtlCol="0" anchor="ctr"/>
+          <a:lstStyle/>
+          <a:p>
+            <a:pPr indent="0" marL="0">
+              <a:buNone/>
+            </a:pPr>
+            <a:r>
+              <a:rPr lang="en-US" sz="3000" b="1" dirty="0">
                 <a:solidFill>
                   <a:srgbClr val="0070C0"/>
                 </a:solidFill>
@@ -28256,7 +28256,7 @@
               </a:rPr>
               <a:t>0 원</a:t>
             </a:r>
-            <a:endParaRPr lang="en-US" sz="3600" dirty="0"/>
+            <a:endParaRPr lang="en-US" sz="3000" dirty="0"/>
           </a:p>
         </p:txBody>
       </p:sp>
@@ -28562,8 +28562,8 @@
         </p:nvSpPr>
         <p:spPr>
           <a:xfrm>
-            <a:off x="704088" y="4709160"/>
-            <a:ext cx="2320290" cy="548640"/>
+            <a:off x="704088" y="4681728"/>
+            <a:ext cx="2320290" cy="658368"/>
           </a:xfrm>
           <a:prstGeom prst="rect">
             <a:avLst/>
@@ -28668,8 +28668,8 @@
         </p:nvSpPr>
         <p:spPr>
           <a:xfrm>
-            <a:off x="3664458" y="4709160"/>
-            <a:ext cx="2320290" cy="548640"/>
+            <a:off x="3664458" y="4681728"/>
+            <a:ext cx="2320290" cy="658368"/>
           </a:xfrm>
           <a:prstGeom prst="rect">
             <a:avLst/>
@@ -28774,8 +28774,8 @@
         </p:nvSpPr>
         <p:spPr>
           <a:xfrm>
-            <a:off x="6624828" y="4709160"/>
-            <a:ext cx="2320290" cy="548640"/>
+            <a:off x="6624828" y="4681728"/>
+            <a:ext cx="2320290" cy="658368"/>
           </a:xfrm>
           <a:prstGeom prst="rect">
             <a:avLst/>
@@ -28880,8 +28880,8 @@
         </p:nvSpPr>
         <p:spPr>
           <a:xfrm>
-            <a:off x="9585198" y="4709160"/>
-            <a:ext cx="2320290" cy="548640"/>
+            <a:off x="9585198" y="4681728"/>
+            <a:ext cx="2320290" cy="658368"/>
           </a:xfrm>
           <a:prstGeom prst="rect">
             <a:avLst/>
